--- a/exports/pptx/lessons/middle-module-04-doshas/day-10-final-assessment.pptx
+++ b/exports/pptx/lessons/middle-module-04-doshas/day-10-final-assessment.pptx
@@ -16,9 +16,12 @@
     <p:sldId id="264" r:id="rId10"/>
     <p:sldId id="265" r:id="rId11"/>
     <p:sldId id="266" r:id="rId12"/>
+    <p:sldId id="267" r:id="rId13"/>
+    <p:sldId id="268" r:id="rId14"/>
+    <p:sldId id="269" r:id="rId15"/>
   </p:sldIdLst>
   <p:notesMasterIdLst>
-    <p:notesMasterId r:id="rId13"/>
+    <p:notesMasterId r:id="rId16"/>
   </p:notesMasterIdLst>
   <p:sldSz cx="9144000" cy="5143500"/>
   <p:notesSz cx="5143500" cy="9144000"/>
@@ -712,6 +715,270 @@
             <a:fld id="{F7021451-1387-4CA6-816F-3879F97B5CBC}" type="slidenum">
               <a:rPr lang="en-US"/>
               <a:t>11</a:t>
+            </a:fld>
+            <a:endParaRPr lang="en-US"/>
+          </a:p>
+        </p:txBody>
+      </p:sp>
+    </p:spTree>
+    <p:extLst>
+      <p:ext uri="{BB962C8B-B14F-4D97-AF65-F5344CB8AC3E}">
+        <p14:creationId xmlns:p14="http://schemas.microsoft.com/office/powerpoint/2010/main" val="1024086991"/>
+      </p:ext>
+    </p:extLst>
+  </p:cSld>
+  <p:clrMapOvr>
+    <a:masterClrMapping/>
+  </p:clrMapOvr>
+</p:notes>
+</file>
+
+<file path=ppt/notesSlides/notesSlide12.xml><?xml version="1.0" encoding="utf-8"?>
+<p:notes xmlns:a="http://schemas.openxmlformats.org/drawingml/2006/main" xmlns:r="http://schemas.openxmlformats.org/officeDocument/2006/relationships" xmlns:p="http://schemas.openxmlformats.org/presentationml/2006/main">
+  <p:cSld>
+    <p:spTree>
+      <p:nvGrpSpPr>
+        <p:cNvPr id="1" name=""/>
+        <p:cNvGrpSpPr/>
+        <p:nvPr/>
+      </p:nvGrpSpPr>
+      <p:grpSpPr>
+        <a:xfrm>
+          <a:off x="0" y="0"/>
+          <a:ext cx="0" cy="0"/>
+          <a:chOff x="0" y="0"/>
+          <a:chExt cx="0" cy="0"/>
+        </a:xfrm>
+      </p:grpSpPr>
+      <p:sp>
+        <p:nvSpPr>
+          <p:cNvPr id="2" name="Slide Image Placeholder 1"/>
+          <p:cNvSpPr>
+            <a:spLocks noGrp="1" noRot="1" noChangeAspect="1"/>
+          </p:cNvSpPr>
+          <p:nvPr>
+            <p:ph type="sldImg"/>
+          </p:nvPr>
+        </p:nvSpPr>
+        <p:spPr/>
+      </p:sp>
+      <p:sp>
+        <p:nvSpPr>
+          <p:cNvPr id="3" name="Notes Placeholder 2"/>
+          <p:cNvSpPr>
+            <a:spLocks noGrp="1"/>
+          </p:cNvSpPr>
+          <p:nvPr>
+            <p:ph type="body" idx="1"/>
+          </p:nvPr>
+        </p:nvSpPr>
+        <p:spPr/>
+        <p:txBody>
+          <a:bodyPr/>
+          <a:lstStyle/>
+          <a:p>
+            <a:r>
+              <a:rPr lang="en-US" dirty="0"/>
+              <a:t/>
+            </a:r>
+            <a:endParaRPr lang="en-US" dirty="0"/>
+          </a:p>
+        </p:txBody>
+      </p:sp>
+      <p:sp>
+        <p:nvSpPr>
+          <p:cNvPr id="4" name="Slide Number Placeholder 3"/>
+          <p:cNvSpPr>
+            <a:spLocks noGrp="1"/>
+          </p:cNvSpPr>
+          <p:nvPr>
+            <p:ph type="sldNum" sz="quarter" idx="10"/>
+          </p:nvPr>
+        </p:nvSpPr>
+        <p:spPr/>
+        <p:txBody>
+          <a:bodyPr/>
+          <a:lstStyle/>
+          <a:p>
+            <a:fld id="{F7021451-1387-4CA6-816F-3879F97B5CBC}" type="slidenum">
+              <a:rPr lang="en-US"/>
+              <a:t>12</a:t>
+            </a:fld>
+            <a:endParaRPr lang="en-US"/>
+          </a:p>
+        </p:txBody>
+      </p:sp>
+    </p:spTree>
+    <p:extLst>
+      <p:ext uri="{BB962C8B-B14F-4D97-AF65-F5344CB8AC3E}">
+        <p14:creationId xmlns:p14="http://schemas.microsoft.com/office/powerpoint/2010/main" val="1024086991"/>
+      </p:ext>
+    </p:extLst>
+  </p:cSld>
+  <p:clrMapOvr>
+    <a:masterClrMapping/>
+  </p:clrMapOvr>
+</p:notes>
+</file>
+
+<file path=ppt/notesSlides/notesSlide13.xml><?xml version="1.0" encoding="utf-8"?>
+<p:notes xmlns:a="http://schemas.openxmlformats.org/drawingml/2006/main" xmlns:r="http://schemas.openxmlformats.org/officeDocument/2006/relationships" xmlns:p="http://schemas.openxmlformats.org/presentationml/2006/main">
+  <p:cSld>
+    <p:spTree>
+      <p:nvGrpSpPr>
+        <p:cNvPr id="1" name=""/>
+        <p:cNvGrpSpPr/>
+        <p:nvPr/>
+      </p:nvGrpSpPr>
+      <p:grpSpPr>
+        <a:xfrm>
+          <a:off x="0" y="0"/>
+          <a:ext cx="0" cy="0"/>
+          <a:chOff x="0" y="0"/>
+          <a:chExt cx="0" cy="0"/>
+        </a:xfrm>
+      </p:grpSpPr>
+      <p:sp>
+        <p:nvSpPr>
+          <p:cNvPr id="2" name="Slide Image Placeholder 1"/>
+          <p:cNvSpPr>
+            <a:spLocks noGrp="1" noRot="1" noChangeAspect="1"/>
+          </p:cNvSpPr>
+          <p:nvPr>
+            <p:ph type="sldImg"/>
+          </p:nvPr>
+        </p:nvSpPr>
+        <p:spPr/>
+      </p:sp>
+      <p:sp>
+        <p:nvSpPr>
+          <p:cNvPr id="3" name="Notes Placeholder 2"/>
+          <p:cNvSpPr>
+            <a:spLocks noGrp="1"/>
+          </p:cNvSpPr>
+          <p:nvPr>
+            <p:ph type="body" idx="1"/>
+          </p:nvPr>
+        </p:nvSpPr>
+        <p:spPr/>
+        <p:txBody>
+          <a:bodyPr/>
+          <a:lstStyle/>
+          <a:p>
+            <a:r>
+              <a:rPr lang="en-US" dirty="0"/>
+              <a:t/>
+            </a:r>
+            <a:endParaRPr lang="en-US" dirty="0"/>
+          </a:p>
+        </p:txBody>
+      </p:sp>
+      <p:sp>
+        <p:nvSpPr>
+          <p:cNvPr id="4" name="Slide Number Placeholder 3"/>
+          <p:cNvSpPr>
+            <a:spLocks noGrp="1"/>
+          </p:cNvSpPr>
+          <p:nvPr>
+            <p:ph type="sldNum" sz="quarter" idx="10"/>
+          </p:nvPr>
+        </p:nvSpPr>
+        <p:spPr/>
+        <p:txBody>
+          <a:bodyPr/>
+          <a:lstStyle/>
+          <a:p>
+            <a:fld id="{F7021451-1387-4CA6-816F-3879F97B5CBC}" type="slidenum">
+              <a:rPr lang="en-US"/>
+              <a:t>13</a:t>
+            </a:fld>
+            <a:endParaRPr lang="en-US"/>
+          </a:p>
+        </p:txBody>
+      </p:sp>
+    </p:spTree>
+    <p:extLst>
+      <p:ext uri="{BB962C8B-B14F-4D97-AF65-F5344CB8AC3E}">
+        <p14:creationId xmlns:p14="http://schemas.microsoft.com/office/powerpoint/2010/main" val="1024086991"/>
+      </p:ext>
+    </p:extLst>
+  </p:cSld>
+  <p:clrMapOvr>
+    <a:masterClrMapping/>
+  </p:clrMapOvr>
+</p:notes>
+</file>
+
+<file path=ppt/notesSlides/notesSlide14.xml><?xml version="1.0" encoding="utf-8"?>
+<p:notes xmlns:a="http://schemas.openxmlformats.org/drawingml/2006/main" xmlns:r="http://schemas.openxmlformats.org/officeDocument/2006/relationships" xmlns:p="http://schemas.openxmlformats.org/presentationml/2006/main">
+  <p:cSld>
+    <p:spTree>
+      <p:nvGrpSpPr>
+        <p:cNvPr id="1" name=""/>
+        <p:cNvGrpSpPr/>
+        <p:nvPr/>
+      </p:nvGrpSpPr>
+      <p:grpSpPr>
+        <a:xfrm>
+          <a:off x="0" y="0"/>
+          <a:ext cx="0" cy="0"/>
+          <a:chOff x="0" y="0"/>
+          <a:chExt cx="0" cy="0"/>
+        </a:xfrm>
+      </p:grpSpPr>
+      <p:sp>
+        <p:nvSpPr>
+          <p:cNvPr id="2" name="Slide Image Placeholder 1"/>
+          <p:cNvSpPr>
+            <a:spLocks noGrp="1" noRot="1" noChangeAspect="1"/>
+          </p:cNvSpPr>
+          <p:nvPr>
+            <p:ph type="sldImg"/>
+          </p:nvPr>
+        </p:nvSpPr>
+        <p:spPr/>
+      </p:sp>
+      <p:sp>
+        <p:nvSpPr>
+          <p:cNvPr id="3" name="Notes Placeholder 2"/>
+          <p:cNvSpPr>
+            <a:spLocks noGrp="1"/>
+          </p:cNvSpPr>
+          <p:nvPr>
+            <p:ph type="body" idx="1"/>
+          </p:nvPr>
+        </p:nvSpPr>
+        <p:spPr/>
+        <p:txBody>
+          <a:bodyPr/>
+          <a:lstStyle/>
+          <a:p>
+            <a:r>
+              <a:rPr lang="en-US" dirty="0"/>
+              <a:t/>
+            </a:r>
+            <a:endParaRPr lang="en-US" dirty="0"/>
+          </a:p>
+        </p:txBody>
+      </p:sp>
+      <p:sp>
+        <p:nvSpPr>
+          <p:cNvPr id="4" name="Slide Number Placeholder 3"/>
+          <p:cNvSpPr>
+            <a:spLocks noGrp="1"/>
+          </p:cNvSpPr>
+          <p:nvPr>
+            <p:ph type="sldNum" sz="quarter" idx="10"/>
+          </p:nvPr>
+        </p:nvSpPr>
+        <p:spPr/>
+        <p:txBody>
+          <a:bodyPr/>
+          <a:lstStyle/>
+          <a:p>
+            <a:fld id="{F7021451-1387-4CA6-816F-3879F97B5CBC}" type="slidenum">
+              <a:rPr lang="en-US"/>
+              <a:t>14</a:t>
             </a:fld>
             <a:endParaRPr lang="en-US"/>
           </a:p>
@@ -2011,148 +2278,6 @@
         </p:nvSpPr>
         <p:spPr>
           <a:xfrm>
-            <a:off x="406301" y="1223963"/>
-            <a:ext cx="8498026" cy="274290"/>
-          </a:xfrm>
-          <a:prstGeom prst="rect">
-            <a:avLst/>
-          </a:prstGeom>
-          <a:noFill/>
-          <a:ln/>
-        </p:spPr>
-        <p:txBody>
-          <a:bodyPr wrap="square" lIns="0" tIns="0" rIns="0" bIns="0" rtlCol="0" anchor="t"/>
-          <a:lstStyle/>
-          <a:p>
-            <a:pPr algn="l" indent="0" marL="0">
-              <a:lnSpc>
-                <a:spcPts val="2160"/>
-              </a:lnSpc>
-              <a:spcBef>
-                <a:spcPts val="600"/>
-              </a:spcBef>
-              <a:spcAft>
-                <a:spcPts val="800"/>
-              </a:spcAft>
-              <a:buNone/>
-            </a:pPr>
-            <a:r>
-              <a:rPr lang="en-US" sz="1800" b="1" dirty="0">
-                <a:solidFill>
-                  <a:srgbClr val="FE4447"/>
-                </a:solidFill>
-                <a:latin typeface="Georgia" pitchFamily="34" charset="0"/>
-                <a:ea typeface="Georgia" pitchFamily="34" charset="-122"/>
-                <a:cs typeface="Georgia" pitchFamily="34" charset="-120"/>
-              </a:rPr>
-              <a:t>Learning objective</a:t>
-            </a:r>
-            <a:endParaRPr lang="en-US" sz="1800" dirty="0"/>
-          </a:p>
-        </p:txBody>
-      </p:sp>
-      <p:sp>
-        <p:nvSpPr>
-          <p:cNvPr id="6" name="Text 4"/>
-          <p:cNvSpPr/>
-          <p:nvPr/>
-        </p:nvSpPr>
-        <p:spPr>
-          <a:xfrm>
-            <a:off x="406301" y="1637854"/>
-            <a:ext cx="8498026" cy="426541"/>
-          </a:xfrm>
-          <a:prstGeom prst="rect">
-            <a:avLst/>
-          </a:prstGeom>
-          <a:noFill/>
-          <a:ln/>
-        </p:spPr>
-        <p:txBody>
-          <a:bodyPr wrap="square" lIns="0" tIns="0" rIns="0" bIns="0" rtlCol="0" anchor="t"/>
-          <a:lstStyle/>
-          <a:p>
-            <a:pPr algn="l" indent="0" marL="0">
-              <a:lnSpc>
-                <a:spcPts val="1680"/>
-              </a:lnSpc>
-              <a:spcBef>
-                <a:spcPts val="300"/>
-              </a:spcBef>
-              <a:spcAft>
-                <a:spcPts val="300"/>
-              </a:spcAft>
-              <a:buNone/>
-            </a:pPr>
-            <a:r>
-              <a:rPr lang="en-US" sz="1200" dirty="0">
-                <a:solidFill>
-                  <a:srgbClr val="1C2833"/>
-                </a:solidFill>
-                <a:latin typeface="Arial" pitchFamily="34" charset="0"/>
-                <a:ea typeface="Arial" pitchFamily="34" charset="-122"/>
-                <a:cs typeface="Arial" pitchFamily="34" charset="-120"/>
-              </a:rPr>
-              <a:t>Students demonstrate (a) mastery of the module's concepts in a written summative quiz, and (b) their integrated </a:t>
-            </a:r>
-            <a:pPr algn="l" indent="0" marL="0">
-              <a:lnSpc>
-                <a:spcPts val="1680"/>
-              </a:lnSpc>
-              <a:spcBef>
-                <a:spcPts val="300"/>
-              </a:spcBef>
-              <a:spcAft>
-                <a:spcPts val="300"/>
-              </a:spcAft>
-              <a:buNone/>
-            </a:pPr>
-            <a:r>
-              <a:rPr lang="en-US" sz="1200" i="1" dirty="0">
-                <a:solidFill>
-                  <a:srgbClr val="1C2833"/>
-                </a:solidFill>
-                <a:latin typeface="Arial" pitchFamily="34" charset="0"/>
-                <a:ea typeface="Arial" pitchFamily="34" charset="-122"/>
-                <a:cs typeface="Arial" pitchFamily="34" charset="-120"/>
-              </a:rPr>
-              <a:t>5-day doṣa-aware week</a:t>
-            </a:r>
-            <a:pPr algn="l" indent="0" marL="0">
-              <a:lnSpc>
-                <a:spcPts val="1680"/>
-              </a:lnSpc>
-              <a:spcBef>
-                <a:spcPts val="300"/>
-              </a:spcBef>
-              <a:spcAft>
-                <a:spcPts val="300"/>
-              </a:spcAft>
-              <a:buNone/>
-            </a:pPr>
-            <a:r>
-              <a:rPr lang="en-US" sz="1200" dirty="0">
-                <a:solidFill>
-                  <a:srgbClr val="1C2833"/>
-                </a:solidFill>
-                <a:latin typeface="Arial" pitchFamily="34" charset="0"/>
-                <a:ea typeface="Arial" pitchFamily="34" charset="-122"/>
-                <a:cs typeface="Arial" pitchFamily="34" charset="-120"/>
-              </a:rPr>
-              <a:t> project in a 3-minute presentation.</a:t>
-            </a:r>
-            <a:endParaRPr lang="en-US" sz="1200" dirty="0"/>
-          </a:p>
-        </p:txBody>
-      </p:sp>
-      <p:sp>
-        <p:nvSpPr>
-          <p:cNvPr id="7" name="Text 5"/>
-          <p:cNvSpPr/>
-          <p:nvPr/>
-        </p:nvSpPr>
-        <p:spPr>
-          <a:xfrm>
             <a:off x="406301" y="4434929"/>
             <a:ext cx="8498026" cy="213271"/>
           </a:xfrm>
@@ -2297,7 +2422,7 @@
                 <a:ea typeface="Georgia" pitchFamily="34" charset="-122"/>
                 <a:cs typeface="Georgia" pitchFamily="34" charset="-120"/>
               </a:rPr>
-              <a:t>Teacher notes</a:t>
+              <a:t>Student-facing content</a:t>
             </a:r>
             <a:endParaRPr lang="en-US" sz="1800" dirty="0"/>
           </a:p>
@@ -2311,8 +2436,61 @@
         </p:nvSpPr>
         <p:spPr>
           <a:xfrm>
-            <a:off x="406301" y="870942"/>
-            <a:ext cx="8498026" cy="853083"/>
+            <a:off x="406301" y="883593"/>
+            <a:ext cx="8331398" cy="1688306"/>
+          </a:xfrm>
+          <a:prstGeom prst="rect">
+            <a:avLst/>
+          </a:prstGeom>
+          <a:solidFill>
+            <a:srgbClr val="F4F8F9"/>
+          </a:solidFill>
+          <a:ln/>
+        </p:spPr>
+        <p:txBody>
+          <a:bodyPr wrap="square" rtlCol="0" anchor="ctr"/>
+          <a:lstStyle/>
+          <a:p>
+            <a:pPr indent="0" marL="0">
+              <a:buNone/>
+            </a:pPr>
+            <a:endParaRPr lang="en-US" dirty="0"/>
+          </a:p>
+        </p:txBody>
+      </p:sp>
+      <p:sp>
+        <p:nvSpPr>
+          <p:cNvPr id="5" name="Shape 3"/>
+          <p:cNvSpPr/>
+          <p:nvPr/>
+        </p:nvSpPr>
+        <p:spPr>
+          <a:xfrm>
+            <a:off x="434876" y="883593"/>
+            <a:ext cx="0" cy="1688306"/>
+          </a:xfrm>
+          <a:prstGeom prst="line">
+            <a:avLst/>
+          </a:prstGeom>
+          <a:noFill/>
+          <a:ln w="57150">
+            <a:solidFill>
+              <a:srgbClr val="FE4447"/>
+            </a:solidFill>
+            <a:prstDash val="solid"/>
+          </a:ln>
+        </p:spPr>
+      </p:sp>
+      <p:sp>
+        <p:nvSpPr>
+          <p:cNvPr id="6" name="Text 4"/>
+          <p:cNvSpPr/>
+          <p:nvPr/>
+        </p:nvSpPr>
+        <p:spPr>
+          <a:xfrm>
+            <a:off x="692051" y="1074093"/>
+            <a:ext cx="7973389" cy="230981"/>
           </a:xfrm>
           <a:prstGeom prst="rect">
             <a:avLst/>
@@ -2326,7 +2504,7 @@
           <a:p>
             <a:pPr algn="l" indent="0" marL="0">
               <a:lnSpc>
-                <a:spcPts val="1680"/>
+                <a:spcPts val="1820"/>
               </a:lnSpc>
               <a:spcBef>
                 <a:spcPts val="300"/>
@@ -2337,19 +2515,44 @@
               <a:buNone/>
             </a:pPr>
             <a:r>
-              <a:rPr lang="en-US" sz="1200" dirty="0">
-                <a:solidFill>
-                  <a:srgbClr val="1C2833"/>
-                </a:solidFill>
-                <a:latin typeface="Arial" pitchFamily="34" charset="0"/>
-                <a:ea typeface="Arial" pitchFamily="34" charset="-122"/>
-                <a:cs typeface="Arial" pitchFamily="34" charset="-120"/>
-              </a:rPr>
-              <a:t>– Mark the quiz over the next 2 school days. Project rubric marked in real-time during presentation. – Return marked rubrics within 2 school days. – Some students will not present well under pressure — don't penalise hesitation. The rubric weights </a:t>
-            </a:r>
-            <a:pPr algn="l" indent="0" marL="0">
-              <a:lnSpc>
-                <a:spcPts val="1680"/>
+              <a:rPr lang="en-US" sz="1300" b="1" i="1" dirty="0">
+                <a:solidFill>
+                  <a:srgbClr val="1C2833"/>
+                </a:solidFill>
+                <a:latin typeface="Georgia" pitchFamily="34" charset="0"/>
+                <a:ea typeface="Georgia" pitchFamily="34" charset="-122"/>
+                <a:cs typeface="Georgia" pitchFamily="34" charset="-120"/>
+              </a:rPr>
+              <a:t>What Day 10 covers:</a:t>
+            </a:r>
+            <a:endParaRPr lang="en-US" sz="1300" dirty="0"/>
+          </a:p>
+        </p:txBody>
+      </p:sp>
+      <p:sp>
+        <p:nvSpPr>
+          <p:cNvPr id="7" name="Text 5"/>
+          <p:cNvSpPr/>
+          <p:nvPr/>
+        </p:nvSpPr>
+        <p:spPr>
+          <a:xfrm>
+            <a:off x="692051" y="1343174"/>
+            <a:ext cx="7973389" cy="230981"/>
+          </a:xfrm>
+          <a:prstGeom prst="rect">
+            <a:avLst/>
+          </a:prstGeom>
+          <a:noFill/>
+          <a:ln/>
+        </p:spPr>
+        <p:txBody>
+          <a:bodyPr wrap="square" lIns="0" tIns="0" rIns="0" bIns="0" rtlCol="0" anchor="t"/>
+          <a:lstStyle/>
+          <a:p>
+            <a:pPr algn="l" indent="0" marL="0">
+              <a:lnSpc>
+                <a:spcPts val="1820"/>
               </a:lnSpc>
               <a:spcBef>
                 <a:spcPts val="300"/>
@@ -2360,19 +2563,19 @@
               <a:buNone/>
             </a:pPr>
             <a:r>
-              <a:rPr lang="en-US" sz="1200" i="1" dirty="0">
-                <a:solidFill>
-                  <a:srgbClr val="1C2833"/>
-                </a:solidFill>
-                <a:latin typeface="Arial" pitchFamily="34" charset="0"/>
-                <a:ea typeface="Arial" pitchFamily="34" charset="-122"/>
-                <a:cs typeface="Arial" pitchFamily="34" charset="-120"/>
-              </a:rPr>
-              <a:t>content</a:t>
-            </a:r>
-            <a:pPr algn="l" indent="0" marL="0">
-              <a:lnSpc>
-                <a:spcPts val="1680"/>
+              <a:rPr lang="en-US" sz="1300" b="1" i="1" dirty="0">
+                <a:solidFill>
+                  <a:srgbClr val="1C2833"/>
+                </a:solidFill>
+                <a:latin typeface="Georgia" pitchFamily="34" charset="0"/>
+                <a:ea typeface="Georgia" pitchFamily="34" charset="-122"/>
+                <a:cs typeface="Georgia" pitchFamily="34" charset="-120"/>
+              </a:rPr>
+              <a:t>Summative quiz</a:t>
+            </a:r>
+            <a:pPr algn="l" indent="0" marL="0">
+              <a:lnSpc>
+                <a:spcPts val="1820"/>
               </a:lnSpc>
               <a:spcBef>
                 <a:spcPts val="300"/>
@@ -2383,19 +2586,44 @@
               <a:buNone/>
             </a:pPr>
             <a:r>
-              <a:rPr lang="en-US" sz="1200" dirty="0">
-                <a:solidFill>
-                  <a:srgbClr val="1C2833"/>
-                </a:solidFill>
-                <a:latin typeface="Arial" pitchFamily="34" charset="0"/>
-                <a:ea typeface="Arial" pitchFamily="34" charset="-122"/>
-                <a:cs typeface="Arial" pitchFamily="34" charset="-120"/>
-              </a:rPr>
-              <a:t> over </a:t>
-            </a:r>
-            <a:pPr algn="l" indent="0" marL="0">
-              <a:lnSpc>
-                <a:spcPts val="1680"/>
+              <a:rPr lang="en-US" sz="1300" dirty="0">
+                <a:solidFill>
+                  <a:srgbClr val="1C2833"/>
+                </a:solidFill>
+                <a:latin typeface="Georgia" pitchFamily="34" charset="0"/>
+                <a:ea typeface="Georgia" pitchFamily="34" charset="-122"/>
+                <a:cs typeface="Georgia" pitchFamily="34" charset="-120"/>
+              </a:rPr>
+              <a:t> (20 min, 25 marks). Closed book. Mix of MCQ, short answer, diagram, open response.</a:t>
+            </a:r>
+            <a:endParaRPr lang="en-US" sz="1300" dirty="0"/>
+          </a:p>
+        </p:txBody>
+      </p:sp>
+      <p:sp>
+        <p:nvSpPr>
+          <p:cNvPr id="8" name="Text 6"/>
+          <p:cNvSpPr/>
+          <p:nvPr/>
+        </p:nvSpPr>
+        <p:spPr>
+          <a:xfrm>
+            <a:off x="692051" y="1612255"/>
+            <a:ext cx="7973389" cy="230981"/>
+          </a:xfrm>
+          <a:prstGeom prst="rect">
+            <a:avLst/>
+          </a:prstGeom>
+          <a:noFill/>
+          <a:ln/>
+        </p:spPr>
+        <p:txBody>
+          <a:bodyPr wrap="square" lIns="0" tIns="0" rIns="0" bIns="0" rtlCol="0" anchor="t"/>
+          <a:lstStyle/>
+          <a:p>
+            <a:pPr algn="l" indent="0" marL="0">
+              <a:lnSpc>
+                <a:spcPts val="1820"/>
               </a:lnSpc>
               <a:spcBef>
                 <a:spcPts val="300"/>
@@ -2406,19 +2634,19 @@
               <a:buNone/>
             </a:pPr>
             <a:r>
-              <a:rPr lang="en-US" sz="1200" i="1" dirty="0">
-                <a:solidFill>
-                  <a:srgbClr val="1C2833"/>
-                </a:solidFill>
-                <a:latin typeface="Arial" pitchFamily="34" charset="0"/>
-                <a:ea typeface="Arial" pitchFamily="34" charset="-122"/>
-                <a:cs typeface="Arial" pitchFamily="34" charset="-120"/>
-              </a:rPr>
-              <a:t>polish</a:t>
-            </a:r>
-            <a:pPr algn="l" indent="0" marL="0">
-              <a:lnSpc>
-                <a:spcPts val="1680"/>
+              <a:rPr lang="en-US" sz="1300" b="1" i="1" dirty="0">
+                <a:solidFill>
+                  <a:srgbClr val="1C2833"/>
+                </a:solidFill>
+                <a:latin typeface="Georgia" pitchFamily="34" charset="0"/>
+                <a:ea typeface="Georgia" pitchFamily="34" charset="-122"/>
+                <a:cs typeface="Georgia" pitchFamily="34" charset="-120"/>
+              </a:rPr>
+              <a:t>3-min presentation</a:t>
+            </a:r>
+            <a:pPr algn="l" indent="0" marL="0">
+              <a:lnSpc>
+                <a:spcPts val="1820"/>
               </a:lnSpc>
               <a:spcBef>
                 <a:spcPts val="300"/>
@@ -2429,23 +2657,211 @@
               <a:buNone/>
             </a:pPr>
             <a:r>
-              <a:rPr lang="en-US" sz="1200" dirty="0">
-                <a:solidFill>
-                  <a:srgbClr val="1C2833"/>
-                </a:solidFill>
-                <a:latin typeface="Arial" pitchFamily="34" charset="0"/>
-                <a:ea typeface="Arial" pitchFamily="34" charset="-122"/>
-                <a:cs typeface="Arial" pitchFamily="34" charset="-120"/>
-              </a:rPr>
-              <a:t>. – If a student is absent on Day 10 — schedule a make-up presentation within the week; quiz can be taken alone at lunchtime.</a:t>
-            </a:r>
-            <a:endParaRPr lang="en-US" sz="1200" dirty="0"/>
-          </a:p>
-        </p:txBody>
-      </p:sp>
-      <p:sp>
-        <p:nvSpPr>
-          <p:cNvPr id="5" name="Text 3"/>
+              <a:rPr lang="en-US" sz="1300" dirty="0">
+                <a:solidFill>
+                  <a:srgbClr val="1C2833"/>
+                </a:solidFill>
+                <a:latin typeface="Georgia" pitchFamily="34" charset="0"/>
+                <a:ea typeface="Georgia" pitchFamily="34" charset="-122"/>
+                <a:cs typeface="Georgia" pitchFamily="34" charset="-120"/>
+              </a:rPr>
+              <a:t> of your </a:t>
+            </a:r>
+            <a:pPr algn="l" indent="0" marL="0">
+              <a:lnSpc>
+                <a:spcPts val="1820"/>
+              </a:lnSpc>
+              <a:spcBef>
+                <a:spcPts val="300"/>
+              </a:spcBef>
+              <a:spcAft>
+                <a:spcPts val="300"/>
+              </a:spcAft>
+              <a:buNone/>
+            </a:pPr>
+            <a:r>
+              <a:rPr lang="en-US" sz="1300" i="1" dirty="0">
+                <a:solidFill>
+                  <a:srgbClr val="1C2833"/>
+                </a:solidFill>
+                <a:latin typeface="Georgia" pitchFamily="34" charset="0"/>
+                <a:ea typeface="Georgia" pitchFamily="34" charset="-122"/>
+                <a:cs typeface="Georgia" pitchFamily="34" charset="-120"/>
+              </a:rPr>
+              <a:t>5-day doṣa-aware week</a:t>
+            </a:r>
+            <a:pPr algn="l" indent="0" marL="0">
+              <a:lnSpc>
+                <a:spcPts val="1820"/>
+              </a:lnSpc>
+              <a:spcBef>
+                <a:spcPts val="300"/>
+              </a:spcBef>
+              <a:spcAft>
+                <a:spcPts val="300"/>
+              </a:spcAft>
+              <a:buNone/>
+            </a:pPr>
+            <a:r>
+              <a:rPr lang="en-US" sz="1300" dirty="0">
+                <a:solidFill>
+                  <a:srgbClr val="1C2833"/>
+                </a:solidFill>
+                <a:latin typeface="Georgia" pitchFamily="34" charset="0"/>
+                <a:ea typeface="Georgia" pitchFamily="34" charset="-122"/>
+                <a:cs typeface="Georgia" pitchFamily="34" charset="-120"/>
+              </a:rPr>
+              <a:t>. Plus 1 min Q&amp;A.</a:t>
+            </a:r>
+            <a:endParaRPr lang="en-US" sz="1300" dirty="0"/>
+          </a:p>
+        </p:txBody>
+      </p:sp>
+      <p:sp>
+        <p:nvSpPr>
+          <p:cNvPr id="9" name="Text 7"/>
+          <p:cNvSpPr/>
+          <p:nvPr/>
+        </p:nvSpPr>
+        <p:spPr>
+          <a:xfrm>
+            <a:off x="692051" y="1881336"/>
+            <a:ext cx="7973389" cy="230981"/>
+          </a:xfrm>
+          <a:prstGeom prst="rect">
+            <a:avLst/>
+          </a:prstGeom>
+          <a:noFill/>
+          <a:ln/>
+        </p:spPr>
+        <p:txBody>
+          <a:bodyPr wrap="square" lIns="0" tIns="0" rIns="0" bIns="0" rtlCol="0" anchor="t"/>
+          <a:lstStyle/>
+          <a:p>
+            <a:pPr algn="l" indent="0" marL="0">
+              <a:lnSpc>
+                <a:spcPts val="1820"/>
+              </a:lnSpc>
+              <a:spcBef>
+                <a:spcPts val="300"/>
+              </a:spcBef>
+              <a:spcAft>
+                <a:spcPts val="300"/>
+              </a:spcAft>
+              <a:buNone/>
+            </a:pPr>
+            <a:r>
+              <a:rPr lang="en-US" sz="1300" b="1" i="1" dirty="0">
+                <a:solidFill>
+                  <a:srgbClr val="1C2833"/>
+                </a:solidFill>
+                <a:latin typeface="Georgia" pitchFamily="34" charset="0"/>
+                <a:ea typeface="Georgia" pitchFamily="34" charset="-122"/>
+                <a:cs typeface="Georgia" pitchFamily="34" charset="-120"/>
+              </a:rPr>
+              <a:t>Reflection slip</a:t>
+            </a:r>
+            <a:pPr algn="l" indent="0" marL="0">
+              <a:lnSpc>
+                <a:spcPts val="1820"/>
+              </a:lnSpc>
+              <a:spcBef>
+                <a:spcPts val="300"/>
+              </a:spcBef>
+              <a:spcAft>
+                <a:spcPts val="300"/>
+              </a:spcAft>
+              <a:buNone/>
+            </a:pPr>
+            <a:r>
+              <a:rPr lang="en-US" sz="1300" dirty="0">
+                <a:solidFill>
+                  <a:srgbClr val="1C2833"/>
+                </a:solidFill>
+                <a:latin typeface="Georgia" pitchFamily="34" charset="0"/>
+                <a:ea typeface="Georgia" pitchFamily="34" charset="-122"/>
+                <a:cs typeface="Georgia" pitchFamily="34" charset="-120"/>
+              </a:rPr>
+              <a:t> (4 sentences, in class).</a:t>
+            </a:r>
+            <a:endParaRPr lang="en-US" sz="1300" dirty="0"/>
+          </a:p>
+        </p:txBody>
+      </p:sp>
+      <p:sp>
+        <p:nvSpPr>
+          <p:cNvPr id="10" name="Text 8"/>
+          <p:cNvSpPr/>
+          <p:nvPr/>
+        </p:nvSpPr>
+        <p:spPr>
+          <a:xfrm>
+            <a:off x="692051" y="2150418"/>
+            <a:ext cx="7973389" cy="230981"/>
+          </a:xfrm>
+          <a:prstGeom prst="rect">
+            <a:avLst/>
+          </a:prstGeom>
+          <a:noFill/>
+          <a:ln/>
+        </p:spPr>
+        <p:txBody>
+          <a:bodyPr wrap="square" lIns="0" tIns="0" rIns="0" bIns="0" rtlCol="0" anchor="t"/>
+          <a:lstStyle/>
+          <a:p>
+            <a:pPr algn="l" indent="0" marL="0">
+              <a:lnSpc>
+                <a:spcPts val="1820"/>
+              </a:lnSpc>
+              <a:spcBef>
+                <a:spcPts val="300"/>
+              </a:spcBef>
+              <a:spcAft>
+                <a:spcPts val="300"/>
+              </a:spcAft>
+              <a:buNone/>
+            </a:pPr>
+            <a:r>
+              <a:rPr lang="en-US" sz="1300" b="1" i="1" dirty="0">
+                <a:solidFill>
+                  <a:srgbClr val="1C2833"/>
+                </a:solidFill>
+                <a:latin typeface="Georgia" pitchFamily="34" charset="0"/>
+                <a:ea typeface="Georgia" pitchFamily="34" charset="-122"/>
+                <a:cs typeface="Georgia" pitchFamily="34" charset="-120"/>
+              </a:rPr>
+              <a:t>Total grade:</a:t>
+            </a:r>
+            <a:pPr algn="l" indent="0" marL="0">
+              <a:lnSpc>
+                <a:spcPts val="1820"/>
+              </a:lnSpc>
+              <a:spcBef>
+                <a:spcPts val="300"/>
+              </a:spcBef>
+              <a:spcAft>
+                <a:spcPts val="300"/>
+              </a:spcAft>
+              <a:buNone/>
+            </a:pPr>
+            <a:r>
+              <a:rPr lang="en-US" sz="1300" dirty="0">
+                <a:solidFill>
+                  <a:srgbClr val="1C2833"/>
+                </a:solidFill>
+                <a:latin typeface="Georgia" pitchFamily="34" charset="0"/>
+                <a:ea typeface="Georgia" pitchFamily="34" charset="-122"/>
+                <a:cs typeface="Georgia" pitchFamily="34" charset="-120"/>
+              </a:rPr>
+              <a:t> 40 marks (25 quiz + 30 project — see rubric — scaled with presentation).</a:t>
+            </a:r>
+            <a:endParaRPr lang="en-US" sz="1300" dirty="0"/>
+          </a:p>
+        </p:txBody>
+      </p:sp>
+      <p:sp>
+        <p:nvSpPr>
+          <p:cNvPr id="11" name="Text 9"/>
           <p:cNvSpPr/>
           <p:nvPr/>
         </p:nvSpPr>
@@ -2595,7 +3011,7 @@
                 <a:ea typeface="Georgia" pitchFamily="34" charset="-122"/>
                 <a:cs typeface="Georgia" pitchFamily="34" charset="-120"/>
               </a:rPr>
-              <a:t>Citation(s) used in this lesson</a:t>
+              <a:t>Closing</a:t>
             </a:r>
             <a:endParaRPr lang="en-US" sz="1800" dirty="0"/>
           </a:p>
@@ -2609,8 +3025,8 @@
         </p:nvSpPr>
         <p:spPr>
           <a:xfrm>
-            <a:off x="406301" y="870942"/>
-            <a:ext cx="8498026" cy="213271"/>
+            <a:off x="634901" y="883593"/>
+            <a:ext cx="8102798" cy="525661"/>
           </a:xfrm>
           <a:prstGeom prst="rect">
             <a:avLst/>
@@ -2622,17 +3038,15 @@
           <a:bodyPr wrap="square" lIns="0" tIns="0" rIns="0" bIns="0" rtlCol="0" anchor="t"/>
           <a:lstStyle/>
           <a:p>
-            <a:pPr algn="l" indent="0" marL="0">
-              <a:lnSpc>
-                <a:spcPts val="1680"/>
-              </a:lnSpc>
-              <a:spcBef>
-                <a:spcPts val="300"/>
-              </a:spcBef>
-              <a:spcAft>
-                <a:spcPts val="300"/>
-              </a:spcAft>
-              <a:buNone/>
+            <a:pPr algn="l" marL="342900" indent="-342900">
+              <a:lnSpc>
+                <a:spcPts val="1620"/>
+              </a:lnSpc>
+              <a:spcAft>
+                <a:spcPts val="300"/>
+              </a:spcAft>
+              <a:buSzPct val="100000"/>
+              <a:buChar char="•"/>
             </a:pPr>
             <a:r>
               <a:rPr lang="en-US" sz="1200" dirty="0">
@@ -2643,7 +3057,879 @@
                 <a:ea typeface="Arial" pitchFamily="34" charset="-122"/>
                 <a:cs typeface="Arial" pitchFamily="34" charset="-120"/>
               </a:rPr>
-              <a:t>– N/A — assessment day.</a:t>
+              <a:t>Class chants the three doṣa names + qualities one last time.</a:t>
+            </a:r>
+            <a:endParaRPr lang="en-US" sz="1200" dirty="0"/>
+          </a:p>
+          <a:p>
+            <a:pPr algn="l" marL="342900" indent="-342900">
+              <a:lnSpc>
+                <a:spcPts val="1620"/>
+              </a:lnSpc>
+              <a:spcAft>
+                <a:spcPts val="300"/>
+              </a:spcAft>
+              <a:buSzPct val="100000"/>
+              <a:buChar char="•"/>
+            </a:pPr>
+            <a:r>
+              <a:rPr lang="en-US" sz="1200" dirty="0">
+                <a:solidFill>
+                  <a:srgbClr val="1C2833"/>
+                </a:solidFill>
+                <a:latin typeface="Arial" pitchFamily="34" charset="0"/>
+                <a:ea typeface="Arial" pitchFamily="34" charset="-122"/>
+                <a:cs typeface="Arial" pitchFamily="34" charset="-120"/>
+              </a:rPr>
+              <a:t>Teacher closes with one sentence: </a:t>
+            </a:r>
+            <a:pPr algn="l" indent="0" marL="0">
+              <a:lnSpc>
+                <a:spcPts val="1620"/>
+              </a:lnSpc>
+              <a:spcAft>
+                <a:spcPts val="300"/>
+              </a:spcAft>
+              <a:buNone/>
+            </a:pPr>
+            <a:r>
+              <a:rPr lang="en-US" sz="1200" i="1" dirty="0">
+                <a:solidFill>
+                  <a:srgbClr val="1C2833"/>
+                </a:solidFill>
+                <a:latin typeface="Arial" pitchFamily="34" charset="0"/>
+                <a:ea typeface="Arial" pitchFamily="34" charset="-122"/>
+                <a:cs typeface="Arial" pitchFamily="34" charset="-120"/>
+              </a:rPr>
+              <a:t>"The framework is yours now. Use it lightly. See a doctor when you need to."</a:t>
+            </a:r>
+            <a:endParaRPr lang="en-US" sz="1200" dirty="0"/>
+          </a:p>
+        </p:txBody>
+      </p:sp>
+      <p:sp>
+        <p:nvSpPr>
+          <p:cNvPr id="5" name="Text 3"/>
+          <p:cNvSpPr/>
+          <p:nvPr/>
+        </p:nvSpPr>
+        <p:spPr>
+          <a:xfrm>
+            <a:off x="406301" y="4434929"/>
+            <a:ext cx="8498026" cy="213271"/>
+          </a:xfrm>
+          <a:prstGeom prst="rect">
+            <a:avLst/>
+          </a:prstGeom>
+          <a:noFill/>
+          <a:ln/>
+        </p:spPr>
+        <p:txBody>
+          <a:bodyPr wrap="square" lIns="0" tIns="0" rIns="0" bIns="0" rtlCol="0" anchor="t"/>
+          <a:lstStyle/>
+          <a:p>
+            <a:pPr algn="l" indent="0" marL="0">
+              <a:lnSpc>
+                <a:spcPts val="1680"/>
+              </a:lnSpc>
+              <a:spcBef>
+                <a:spcPts val="300"/>
+              </a:spcBef>
+              <a:spcAft>
+                <a:spcPts val="300"/>
+              </a:spcAft>
+              <a:buNone/>
+            </a:pPr>
+            <a:r>
+              <a:rPr lang="en-US" sz="1200" dirty="0">
+                <a:solidFill>
+                  <a:srgbClr val="1C2833"/>
+                </a:solidFill>
+                <a:latin typeface="Arial" pitchFamily="34" charset="0"/>
+                <a:ea typeface="Arial" pitchFamily="34" charset="-122"/>
+                <a:cs typeface="Arial" pitchFamily="34" charset="-120"/>
+              </a:rPr>
+              <a:t>Middle ·  · IKS Curriculum</a:t>
+            </a:r>
+            <a:endParaRPr lang="en-US" sz="1200" dirty="0"/>
+          </a:p>
+        </p:txBody>
+      </p:sp>
+    </p:spTree>
+  </p:cSld>
+  <p:clrMapOvr>
+    <a:masterClrMapping/>
+  </p:clrMapOvr>
+</p:sld>
+</file>
+
+<file path=ppt/slides/slide12.xml><?xml version="1.0" encoding="utf-8"?>
+<p:sld xmlns:a="http://schemas.openxmlformats.org/drawingml/2006/main" xmlns:r="http://schemas.openxmlformats.org/officeDocument/2006/relationships" xmlns:p="http://schemas.openxmlformats.org/presentationml/2006/main">
+  <p:cSld name="Slide 12">
+    <p:bg>
+      <p:bgPr>
+        <a:solidFill>
+          <a:srgbClr val="FFFFFF"/>
+        </a:solidFill>
+      </p:bgPr>
+    </p:bg>
+    <p:spTree>
+      <p:nvGrpSpPr>
+        <p:cNvPr id="1" name=""/>
+        <p:cNvGrpSpPr/>
+        <p:nvPr/>
+      </p:nvGrpSpPr>
+      <p:grpSpPr>
+        <a:xfrm>
+          <a:off x="0" y="0"/>
+          <a:ext cx="0" cy="0"/>
+          <a:chOff x="0" y="0"/>
+          <a:chExt cx="0" cy="0"/>
+        </a:xfrm>
+      </p:grpSpPr>
+      <p:sp>
+        <p:nvSpPr>
+          <p:cNvPr id="2" name="Text 0"/>
+          <p:cNvSpPr/>
+          <p:nvPr/>
+        </p:nvSpPr>
+        <p:spPr>
+          <a:xfrm>
+            <a:off x="0" y="0"/>
+            <a:ext cx="9144000" cy="101501"/>
+          </a:xfrm>
+          <a:prstGeom prst="rect">
+            <a:avLst/>
+          </a:prstGeom>
+          <a:solidFill>
+            <a:srgbClr val="277884"/>
+          </a:solidFill>
+          <a:ln/>
+        </p:spPr>
+        <p:txBody>
+          <a:bodyPr wrap="square" rtlCol="0" anchor="ctr"/>
+          <a:lstStyle/>
+          <a:p>
+            <a:pPr indent="0" marL="0">
+              <a:buNone/>
+            </a:pPr>
+            <a:endParaRPr lang="en-US" dirty="0"/>
+          </a:p>
+        </p:txBody>
+      </p:sp>
+      <p:sp>
+        <p:nvSpPr>
+          <p:cNvPr id="3" name="Text 1"/>
+          <p:cNvSpPr/>
+          <p:nvPr/>
+        </p:nvSpPr>
+        <p:spPr>
+          <a:xfrm>
+            <a:off x="406301" y="457051"/>
+            <a:ext cx="8498026" cy="274290"/>
+          </a:xfrm>
+          <a:prstGeom prst="rect">
+            <a:avLst/>
+          </a:prstGeom>
+          <a:noFill/>
+          <a:ln/>
+        </p:spPr>
+        <p:txBody>
+          <a:bodyPr wrap="square" lIns="0" tIns="0" rIns="0" bIns="0" rtlCol="0" anchor="t"/>
+          <a:lstStyle/>
+          <a:p>
+            <a:pPr algn="l" indent="0" marL="0">
+              <a:lnSpc>
+                <a:spcPts val="2160"/>
+              </a:lnSpc>
+              <a:spcBef>
+                <a:spcPts val="600"/>
+              </a:spcBef>
+              <a:spcAft>
+                <a:spcPts val="800"/>
+              </a:spcAft>
+              <a:buNone/>
+            </a:pPr>
+            <a:r>
+              <a:rPr lang="en-US" sz="1800" b="1" dirty="0">
+                <a:solidFill>
+                  <a:srgbClr val="FE4447"/>
+                </a:solidFill>
+                <a:latin typeface="Georgia" pitchFamily="34" charset="0"/>
+                <a:ea typeface="Georgia" pitchFamily="34" charset="-122"/>
+                <a:cs typeface="Georgia" pitchFamily="34" charset="-120"/>
+              </a:rPr>
+              <a:t>Differentiation</a:t>
+            </a:r>
+            <a:endParaRPr lang="en-US" sz="1800" dirty="0"/>
+          </a:p>
+        </p:txBody>
+      </p:sp>
+      <p:sp>
+        <p:nvSpPr>
+          <p:cNvPr id="4" name="Text 2"/>
+          <p:cNvSpPr/>
+          <p:nvPr/>
+        </p:nvSpPr>
+        <p:spPr>
+          <a:xfrm>
+            <a:off x="634901" y="883593"/>
+            <a:ext cx="8102798" cy="731341"/>
+          </a:xfrm>
+          <a:prstGeom prst="rect">
+            <a:avLst/>
+          </a:prstGeom>
+          <a:noFill/>
+          <a:ln/>
+        </p:spPr>
+        <p:txBody>
+          <a:bodyPr wrap="square" lIns="0" tIns="0" rIns="0" bIns="0" rtlCol="0" anchor="t"/>
+          <a:lstStyle/>
+          <a:p>
+            <a:pPr algn="l" marL="342900" indent="-342900">
+              <a:lnSpc>
+                <a:spcPts val="1620"/>
+              </a:lnSpc>
+              <a:spcAft>
+                <a:spcPts val="300"/>
+              </a:spcAft>
+              <a:buSzPct val="100000"/>
+              <a:buChar char="•"/>
+            </a:pPr>
+            <a:r>
+              <a:rPr lang="en-US" sz="1200" b="1" dirty="0">
+                <a:solidFill>
+                  <a:srgbClr val="1C2833"/>
+                </a:solidFill>
+                <a:latin typeface="Arial" pitchFamily="34" charset="0"/>
+                <a:ea typeface="Arial" pitchFamily="34" charset="-122"/>
+                <a:cs typeface="Arial" pitchFamily="34" charset="-120"/>
+              </a:rPr>
+              <a:t>One tier up:</a:t>
+            </a:r>
+            <a:pPr algn="l" indent="0" marL="0">
+              <a:lnSpc>
+                <a:spcPts val="1620"/>
+              </a:lnSpc>
+              <a:spcAft>
+                <a:spcPts val="300"/>
+              </a:spcAft>
+              <a:buNone/>
+            </a:pPr>
+            <a:r>
+              <a:rPr lang="en-US" sz="1200" dirty="0">
+                <a:solidFill>
+                  <a:srgbClr val="1C2833"/>
+                </a:solidFill>
+                <a:latin typeface="Arial" pitchFamily="34" charset="0"/>
+                <a:ea typeface="Arial" pitchFamily="34" charset="-122"/>
+                <a:cs typeface="Arial" pitchFamily="34" charset="-120"/>
+              </a:rPr>
+              <a:t> During Q&amp;A, students who finish early can field harder questions ("how would you balance kapha in monsoon vs vāta in winter — argue both?")</a:t>
+            </a:r>
+            <a:endParaRPr lang="en-US" sz="1200" dirty="0"/>
+          </a:p>
+          <a:p>
+            <a:pPr algn="l" marL="342900" indent="-342900">
+              <a:lnSpc>
+                <a:spcPts val="1620"/>
+              </a:lnSpc>
+              <a:spcAft>
+                <a:spcPts val="300"/>
+              </a:spcAft>
+              <a:buSzPct val="100000"/>
+              <a:buChar char="•"/>
+            </a:pPr>
+            <a:r>
+              <a:rPr lang="en-US" sz="1200" b="1" dirty="0">
+                <a:solidFill>
+                  <a:srgbClr val="1C2833"/>
+                </a:solidFill>
+                <a:latin typeface="Arial" pitchFamily="34" charset="0"/>
+                <a:ea typeface="Arial" pitchFamily="34" charset="-122"/>
+                <a:cs typeface="Arial" pitchFamily="34" charset="-120"/>
+              </a:rPr>
+              <a:t>One tier down:</a:t>
+            </a:r>
+            <a:pPr algn="l" indent="0" marL="0">
+              <a:lnSpc>
+                <a:spcPts val="1620"/>
+              </a:lnSpc>
+              <a:spcAft>
+                <a:spcPts val="300"/>
+              </a:spcAft>
+              <a:buNone/>
+            </a:pPr>
+            <a:r>
+              <a:rPr lang="en-US" sz="1200" dirty="0">
+                <a:solidFill>
+                  <a:srgbClr val="1C2833"/>
+                </a:solidFill>
+                <a:latin typeface="Arial" pitchFamily="34" charset="0"/>
+                <a:ea typeface="Arial" pitchFamily="34" charset="-122"/>
+                <a:cs typeface="Arial" pitchFamily="34" charset="-120"/>
+              </a:rPr>
+              <a:t> Allow open-book on the summative quiz's open-response section only.</a:t>
+            </a:r>
+            <a:endParaRPr lang="en-US" sz="1200" dirty="0"/>
+          </a:p>
+        </p:txBody>
+      </p:sp>
+      <p:sp>
+        <p:nvSpPr>
+          <p:cNvPr id="5" name="Text 3"/>
+          <p:cNvSpPr/>
+          <p:nvPr/>
+        </p:nvSpPr>
+        <p:spPr>
+          <a:xfrm>
+            <a:off x="406301" y="4434929"/>
+            <a:ext cx="8498026" cy="213271"/>
+          </a:xfrm>
+          <a:prstGeom prst="rect">
+            <a:avLst/>
+          </a:prstGeom>
+          <a:noFill/>
+          <a:ln/>
+        </p:spPr>
+        <p:txBody>
+          <a:bodyPr wrap="square" lIns="0" tIns="0" rIns="0" bIns="0" rtlCol="0" anchor="t"/>
+          <a:lstStyle/>
+          <a:p>
+            <a:pPr algn="l" indent="0" marL="0">
+              <a:lnSpc>
+                <a:spcPts val="1680"/>
+              </a:lnSpc>
+              <a:spcBef>
+                <a:spcPts val="300"/>
+              </a:spcBef>
+              <a:spcAft>
+                <a:spcPts val="300"/>
+              </a:spcAft>
+              <a:buNone/>
+            </a:pPr>
+            <a:r>
+              <a:rPr lang="en-US" sz="1200" dirty="0">
+                <a:solidFill>
+                  <a:srgbClr val="1C2833"/>
+                </a:solidFill>
+                <a:latin typeface="Arial" pitchFamily="34" charset="0"/>
+                <a:ea typeface="Arial" pitchFamily="34" charset="-122"/>
+                <a:cs typeface="Arial" pitchFamily="34" charset="-120"/>
+              </a:rPr>
+              <a:t>Middle ·  · IKS Curriculum</a:t>
+            </a:r>
+            <a:endParaRPr lang="en-US" sz="1200" dirty="0"/>
+          </a:p>
+        </p:txBody>
+      </p:sp>
+    </p:spTree>
+  </p:cSld>
+  <p:clrMapOvr>
+    <a:masterClrMapping/>
+  </p:clrMapOvr>
+</p:sld>
+</file>
+
+<file path=ppt/slides/slide13.xml><?xml version="1.0" encoding="utf-8"?>
+<p:sld xmlns:a="http://schemas.openxmlformats.org/drawingml/2006/main" xmlns:r="http://schemas.openxmlformats.org/officeDocument/2006/relationships" xmlns:p="http://schemas.openxmlformats.org/presentationml/2006/main">
+  <p:cSld name="Slide 13">
+    <p:bg>
+      <p:bgPr>
+        <a:solidFill>
+          <a:srgbClr val="FFFFFF"/>
+        </a:solidFill>
+      </p:bgPr>
+    </p:bg>
+    <p:spTree>
+      <p:nvGrpSpPr>
+        <p:cNvPr id="1" name=""/>
+        <p:cNvGrpSpPr/>
+        <p:nvPr/>
+      </p:nvGrpSpPr>
+      <p:grpSpPr>
+        <a:xfrm>
+          <a:off x="0" y="0"/>
+          <a:ext cx="0" cy="0"/>
+          <a:chOff x="0" y="0"/>
+          <a:chExt cx="0" cy="0"/>
+        </a:xfrm>
+      </p:grpSpPr>
+      <p:sp>
+        <p:nvSpPr>
+          <p:cNvPr id="2" name="Text 0"/>
+          <p:cNvSpPr/>
+          <p:nvPr/>
+        </p:nvSpPr>
+        <p:spPr>
+          <a:xfrm>
+            <a:off x="0" y="0"/>
+            <a:ext cx="9144000" cy="101501"/>
+          </a:xfrm>
+          <a:prstGeom prst="rect">
+            <a:avLst/>
+          </a:prstGeom>
+          <a:solidFill>
+            <a:srgbClr val="277884"/>
+          </a:solidFill>
+          <a:ln/>
+        </p:spPr>
+        <p:txBody>
+          <a:bodyPr wrap="square" rtlCol="0" anchor="ctr"/>
+          <a:lstStyle/>
+          <a:p>
+            <a:pPr indent="0" marL="0">
+              <a:buNone/>
+            </a:pPr>
+            <a:endParaRPr lang="en-US" dirty="0"/>
+          </a:p>
+        </p:txBody>
+      </p:sp>
+      <p:sp>
+        <p:nvSpPr>
+          <p:cNvPr id="3" name="Text 1"/>
+          <p:cNvSpPr/>
+          <p:nvPr/>
+        </p:nvSpPr>
+        <p:spPr>
+          <a:xfrm>
+            <a:off x="406301" y="457051"/>
+            <a:ext cx="8498026" cy="274290"/>
+          </a:xfrm>
+          <a:prstGeom prst="rect">
+            <a:avLst/>
+          </a:prstGeom>
+          <a:noFill/>
+          <a:ln/>
+        </p:spPr>
+        <p:txBody>
+          <a:bodyPr wrap="square" lIns="0" tIns="0" rIns="0" bIns="0" rtlCol="0" anchor="t"/>
+          <a:lstStyle/>
+          <a:p>
+            <a:pPr algn="l" indent="0" marL="0">
+              <a:lnSpc>
+                <a:spcPts val="2160"/>
+              </a:lnSpc>
+              <a:spcBef>
+                <a:spcPts val="600"/>
+              </a:spcBef>
+              <a:spcAft>
+                <a:spcPts val="800"/>
+              </a:spcAft>
+              <a:buNone/>
+            </a:pPr>
+            <a:r>
+              <a:rPr lang="en-US" sz="1800" b="1" dirty="0">
+                <a:solidFill>
+                  <a:srgbClr val="FE4447"/>
+                </a:solidFill>
+                <a:latin typeface="Georgia" pitchFamily="34" charset="0"/>
+                <a:ea typeface="Georgia" pitchFamily="34" charset="-122"/>
+                <a:cs typeface="Georgia" pitchFamily="34" charset="-120"/>
+              </a:rPr>
+              <a:t>Teacher notes</a:t>
+            </a:r>
+            <a:endParaRPr lang="en-US" sz="1800" dirty="0"/>
+          </a:p>
+        </p:txBody>
+      </p:sp>
+      <p:sp>
+        <p:nvSpPr>
+          <p:cNvPr id="4" name="Text 2"/>
+          <p:cNvSpPr/>
+          <p:nvPr/>
+        </p:nvSpPr>
+        <p:spPr>
+          <a:xfrm>
+            <a:off x="634901" y="883593"/>
+            <a:ext cx="8102798" cy="1218902"/>
+          </a:xfrm>
+          <a:prstGeom prst="rect">
+            <a:avLst/>
+          </a:prstGeom>
+          <a:noFill/>
+          <a:ln/>
+        </p:spPr>
+        <p:txBody>
+          <a:bodyPr wrap="square" lIns="0" tIns="0" rIns="0" bIns="0" rtlCol="0" anchor="t"/>
+          <a:lstStyle/>
+          <a:p>
+            <a:pPr algn="l" marL="342900" indent="-342900">
+              <a:lnSpc>
+                <a:spcPts val="1620"/>
+              </a:lnSpc>
+              <a:spcAft>
+                <a:spcPts val="300"/>
+              </a:spcAft>
+              <a:buSzPct val="100000"/>
+              <a:buChar char="•"/>
+            </a:pPr>
+            <a:r>
+              <a:rPr lang="en-US" sz="1200" dirty="0">
+                <a:solidFill>
+                  <a:srgbClr val="1C2833"/>
+                </a:solidFill>
+                <a:latin typeface="Arial" pitchFamily="34" charset="0"/>
+                <a:ea typeface="Arial" pitchFamily="34" charset="-122"/>
+                <a:cs typeface="Arial" pitchFamily="34" charset="-120"/>
+              </a:rPr>
+              <a:t>Mark the quiz over the next 2 school days. Project rubric marked in real-time during presentation.</a:t>
+            </a:r>
+            <a:endParaRPr lang="en-US" sz="1200" dirty="0"/>
+          </a:p>
+          <a:p>
+            <a:pPr algn="l" marL="342900" indent="-342900">
+              <a:lnSpc>
+                <a:spcPts val="1620"/>
+              </a:lnSpc>
+              <a:spcAft>
+                <a:spcPts val="300"/>
+              </a:spcAft>
+              <a:buSzPct val="100000"/>
+              <a:buChar char="•"/>
+            </a:pPr>
+            <a:r>
+              <a:rPr lang="en-US" sz="1200" dirty="0">
+                <a:solidFill>
+                  <a:srgbClr val="1C2833"/>
+                </a:solidFill>
+                <a:latin typeface="Arial" pitchFamily="34" charset="0"/>
+                <a:ea typeface="Arial" pitchFamily="34" charset="-122"/>
+                <a:cs typeface="Arial" pitchFamily="34" charset="-120"/>
+              </a:rPr>
+              <a:t>Return marked rubrics within 2 school days.</a:t>
+            </a:r>
+            <a:endParaRPr lang="en-US" sz="1200" dirty="0"/>
+          </a:p>
+          <a:p>
+            <a:pPr algn="l" marL="342900" indent="-342900">
+              <a:lnSpc>
+                <a:spcPts val="1620"/>
+              </a:lnSpc>
+              <a:spcAft>
+                <a:spcPts val="300"/>
+              </a:spcAft>
+              <a:buSzPct val="100000"/>
+              <a:buChar char="•"/>
+            </a:pPr>
+            <a:r>
+              <a:rPr lang="en-US" sz="1200" dirty="0">
+                <a:solidFill>
+                  <a:srgbClr val="1C2833"/>
+                </a:solidFill>
+                <a:latin typeface="Arial" pitchFamily="34" charset="0"/>
+                <a:ea typeface="Arial" pitchFamily="34" charset="-122"/>
+                <a:cs typeface="Arial" pitchFamily="34" charset="-120"/>
+              </a:rPr>
+              <a:t>Some students will not present well under pressure — don't penalise hesitation. The rubric weights </a:t>
+            </a:r>
+            <a:pPr algn="l" indent="0" marL="0">
+              <a:lnSpc>
+                <a:spcPts val="1620"/>
+              </a:lnSpc>
+              <a:spcAft>
+                <a:spcPts val="300"/>
+              </a:spcAft>
+              <a:buNone/>
+            </a:pPr>
+            <a:r>
+              <a:rPr lang="en-US" sz="1200" i="1" dirty="0">
+                <a:solidFill>
+                  <a:srgbClr val="1C2833"/>
+                </a:solidFill>
+                <a:latin typeface="Arial" pitchFamily="34" charset="0"/>
+                <a:ea typeface="Arial" pitchFamily="34" charset="-122"/>
+                <a:cs typeface="Arial" pitchFamily="34" charset="-120"/>
+              </a:rPr>
+              <a:t>content</a:t>
+            </a:r>
+            <a:pPr algn="l" indent="0" marL="0">
+              <a:lnSpc>
+                <a:spcPts val="1620"/>
+              </a:lnSpc>
+              <a:spcAft>
+                <a:spcPts val="300"/>
+              </a:spcAft>
+              <a:buNone/>
+            </a:pPr>
+            <a:r>
+              <a:rPr lang="en-US" sz="1200" dirty="0">
+                <a:solidFill>
+                  <a:srgbClr val="1C2833"/>
+                </a:solidFill>
+                <a:latin typeface="Arial" pitchFamily="34" charset="0"/>
+                <a:ea typeface="Arial" pitchFamily="34" charset="-122"/>
+                <a:cs typeface="Arial" pitchFamily="34" charset="-120"/>
+              </a:rPr>
+              <a:t> over </a:t>
+            </a:r>
+            <a:pPr algn="l" indent="0" marL="0">
+              <a:lnSpc>
+                <a:spcPts val="1620"/>
+              </a:lnSpc>
+              <a:spcAft>
+                <a:spcPts val="300"/>
+              </a:spcAft>
+              <a:buNone/>
+            </a:pPr>
+            <a:r>
+              <a:rPr lang="en-US" sz="1200" i="1" dirty="0">
+                <a:solidFill>
+                  <a:srgbClr val="1C2833"/>
+                </a:solidFill>
+                <a:latin typeface="Arial" pitchFamily="34" charset="0"/>
+                <a:ea typeface="Arial" pitchFamily="34" charset="-122"/>
+                <a:cs typeface="Arial" pitchFamily="34" charset="-120"/>
+              </a:rPr>
+              <a:t>polish</a:t>
+            </a:r>
+            <a:pPr algn="l" indent="0" marL="0">
+              <a:lnSpc>
+                <a:spcPts val="1620"/>
+              </a:lnSpc>
+              <a:spcAft>
+                <a:spcPts val="300"/>
+              </a:spcAft>
+              <a:buNone/>
+            </a:pPr>
+            <a:r>
+              <a:rPr lang="en-US" sz="1200" dirty="0">
+                <a:solidFill>
+                  <a:srgbClr val="1C2833"/>
+                </a:solidFill>
+                <a:latin typeface="Arial" pitchFamily="34" charset="0"/>
+                <a:ea typeface="Arial" pitchFamily="34" charset="-122"/>
+                <a:cs typeface="Arial" pitchFamily="34" charset="-120"/>
+              </a:rPr>
+              <a:t>.</a:t>
+            </a:r>
+            <a:endParaRPr lang="en-US" sz="1200" dirty="0"/>
+          </a:p>
+          <a:p>
+            <a:pPr algn="l" marL="342900" indent="-342900">
+              <a:lnSpc>
+                <a:spcPts val="1620"/>
+              </a:lnSpc>
+              <a:spcAft>
+                <a:spcPts val="300"/>
+              </a:spcAft>
+              <a:buSzPct val="100000"/>
+              <a:buChar char="•"/>
+            </a:pPr>
+            <a:r>
+              <a:rPr lang="en-US" sz="1200" dirty="0">
+                <a:solidFill>
+                  <a:srgbClr val="1C2833"/>
+                </a:solidFill>
+                <a:latin typeface="Arial" pitchFamily="34" charset="0"/>
+                <a:ea typeface="Arial" pitchFamily="34" charset="-122"/>
+                <a:cs typeface="Arial" pitchFamily="34" charset="-120"/>
+              </a:rPr>
+              <a:t>If a student is absent on Day 10 — schedule a make-up presentation within the week; quiz can be taken alone at lunchtime.</a:t>
+            </a:r>
+            <a:endParaRPr lang="en-US" sz="1200" dirty="0"/>
+          </a:p>
+        </p:txBody>
+      </p:sp>
+      <p:sp>
+        <p:nvSpPr>
+          <p:cNvPr id="5" name="Text 3"/>
+          <p:cNvSpPr/>
+          <p:nvPr/>
+        </p:nvSpPr>
+        <p:spPr>
+          <a:xfrm>
+            <a:off x="406301" y="4434929"/>
+            <a:ext cx="8498026" cy="213271"/>
+          </a:xfrm>
+          <a:prstGeom prst="rect">
+            <a:avLst/>
+          </a:prstGeom>
+          <a:noFill/>
+          <a:ln/>
+        </p:spPr>
+        <p:txBody>
+          <a:bodyPr wrap="square" lIns="0" tIns="0" rIns="0" bIns="0" rtlCol="0" anchor="t"/>
+          <a:lstStyle/>
+          <a:p>
+            <a:pPr algn="l" indent="0" marL="0">
+              <a:lnSpc>
+                <a:spcPts val="1680"/>
+              </a:lnSpc>
+              <a:spcBef>
+                <a:spcPts val="300"/>
+              </a:spcBef>
+              <a:spcAft>
+                <a:spcPts val="300"/>
+              </a:spcAft>
+              <a:buNone/>
+            </a:pPr>
+            <a:r>
+              <a:rPr lang="en-US" sz="1200" dirty="0">
+                <a:solidFill>
+                  <a:srgbClr val="1C2833"/>
+                </a:solidFill>
+                <a:latin typeface="Arial" pitchFamily="34" charset="0"/>
+                <a:ea typeface="Arial" pitchFamily="34" charset="-122"/>
+                <a:cs typeface="Arial" pitchFamily="34" charset="-120"/>
+              </a:rPr>
+              <a:t>Middle ·  · IKS Curriculum</a:t>
+            </a:r>
+            <a:endParaRPr lang="en-US" sz="1200" dirty="0"/>
+          </a:p>
+        </p:txBody>
+      </p:sp>
+    </p:spTree>
+  </p:cSld>
+  <p:clrMapOvr>
+    <a:masterClrMapping/>
+  </p:clrMapOvr>
+</p:sld>
+</file>
+
+<file path=ppt/slides/slide14.xml><?xml version="1.0" encoding="utf-8"?>
+<p:sld xmlns:a="http://schemas.openxmlformats.org/drawingml/2006/main" xmlns:r="http://schemas.openxmlformats.org/officeDocument/2006/relationships" xmlns:p="http://schemas.openxmlformats.org/presentationml/2006/main">
+  <p:cSld name="Slide 14">
+    <p:bg>
+      <p:bgPr>
+        <a:solidFill>
+          <a:srgbClr val="FFFFFF"/>
+        </a:solidFill>
+      </p:bgPr>
+    </p:bg>
+    <p:spTree>
+      <p:nvGrpSpPr>
+        <p:cNvPr id="1" name=""/>
+        <p:cNvGrpSpPr/>
+        <p:nvPr/>
+      </p:nvGrpSpPr>
+      <p:grpSpPr>
+        <a:xfrm>
+          <a:off x="0" y="0"/>
+          <a:ext cx="0" cy="0"/>
+          <a:chOff x="0" y="0"/>
+          <a:chExt cx="0" cy="0"/>
+        </a:xfrm>
+      </p:grpSpPr>
+      <p:sp>
+        <p:nvSpPr>
+          <p:cNvPr id="2" name="Text 0"/>
+          <p:cNvSpPr/>
+          <p:nvPr/>
+        </p:nvSpPr>
+        <p:spPr>
+          <a:xfrm>
+            <a:off x="0" y="0"/>
+            <a:ext cx="9144000" cy="101501"/>
+          </a:xfrm>
+          <a:prstGeom prst="rect">
+            <a:avLst/>
+          </a:prstGeom>
+          <a:solidFill>
+            <a:srgbClr val="277884"/>
+          </a:solidFill>
+          <a:ln/>
+        </p:spPr>
+        <p:txBody>
+          <a:bodyPr wrap="square" rtlCol="0" anchor="ctr"/>
+          <a:lstStyle/>
+          <a:p>
+            <a:pPr indent="0" marL="0">
+              <a:buNone/>
+            </a:pPr>
+            <a:endParaRPr lang="en-US" dirty="0"/>
+          </a:p>
+        </p:txBody>
+      </p:sp>
+      <p:sp>
+        <p:nvSpPr>
+          <p:cNvPr id="3" name="Text 1"/>
+          <p:cNvSpPr/>
+          <p:nvPr/>
+        </p:nvSpPr>
+        <p:spPr>
+          <a:xfrm>
+            <a:off x="406301" y="457051"/>
+            <a:ext cx="8498026" cy="274290"/>
+          </a:xfrm>
+          <a:prstGeom prst="rect">
+            <a:avLst/>
+          </a:prstGeom>
+          <a:noFill/>
+          <a:ln/>
+        </p:spPr>
+        <p:txBody>
+          <a:bodyPr wrap="square" lIns="0" tIns="0" rIns="0" bIns="0" rtlCol="0" anchor="t"/>
+          <a:lstStyle/>
+          <a:p>
+            <a:pPr algn="l" indent="0" marL="0">
+              <a:lnSpc>
+                <a:spcPts val="2160"/>
+              </a:lnSpc>
+              <a:spcBef>
+                <a:spcPts val="600"/>
+              </a:spcBef>
+              <a:spcAft>
+                <a:spcPts val="800"/>
+              </a:spcAft>
+              <a:buNone/>
+            </a:pPr>
+            <a:r>
+              <a:rPr lang="en-US" sz="1800" b="1" dirty="0">
+                <a:solidFill>
+                  <a:srgbClr val="FE4447"/>
+                </a:solidFill>
+                <a:latin typeface="Georgia" pitchFamily="34" charset="0"/>
+                <a:ea typeface="Georgia" pitchFamily="34" charset="-122"/>
+                <a:cs typeface="Georgia" pitchFamily="34" charset="-120"/>
+              </a:rPr>
+              <a:t>Citation(s) used in this lesson</a:t>
+            </a:r>
+            <a:endParaRPr lang="en-US" sz="1800" dirty="0"/>
+          </a:p>
+        </p:txBody>
+      </p:sp>
+      <p:sp>
+        <p:nvSpPr>
+          <p:cNvPr id="4" name="Text 2"/>
+          <p:cNvSpPr/>
+          <p:nvPr/>
+        </p:nvSpPr>
+        <p:spPr>
+          <a:xfrm>
+            <a:off x="634901" y="883593"/>
+            <a:ext cx="8102798" cy="281880"/>
+          </a:xfrm>
+          <a:prstGeom prst="rect">
+            <a:avLst/>
+          </a:prstGeom>
+          <a:noFill/>
+          <a:ln/>
+        </p:spPr>
+        <p:txBody>
+          <a:bodyPr wrap="square" lIns="0" tIns="0" rIns="0" bIns="0" rtlCol="0" anchor="t"/>
+          <a:lstStyle/>
+          <a:p>
+            <a:pPr algn="l" marL="342900" indent="-342900">
+              <a:lnSpc>
+                <a:spcPts val="1620"/>
+              </a:lnSpc>
+              <a:spcAft>
+                <a:spcPts val="300"/>
+              </a:spcAft>
+              <a:buSzPct val="100000"/>
+              <a:buChar char="•"/>
+            </a:pPr>
+            <a:r>
+              <a:rPr lang="en-US" sz="1200" dirty="0">
+                <a:solidFill>
+                  <a:srgbClr val="1C2833"/>
+                </a:solidFill>
+                <a:latin typeface="Arial" pitchFamily="34" charset="0"/>
+                <a:ea typeface="Arial" pitchFamily="34" charset="-122"/>
+                <a:cs typeface="Arial" pitchFamily="34" charset="-120"/>
+              </a:rPr>
+              <a:t>N/A — assessment day.</a:t>
             </a:r>
             <a:endParaRPr lang="en-US" sz="1200" dirty="0"/>
           </a:p>
@@ -2801,7 +4087,7 @@
                 <a:ea typeface="Georgia" pitchFamily="34" charset="-122"/>
                 <a:cs typeface="Georgia" pitchFamily="34" charset="-120"/>
               </a:rPr>
-              <a:t>Materials</a:t>
+              <a:t>Learning objective</a:t>
             </a:r>
             <a:endParaRPr lang="en-US" sz="1800" dirty="0"/>
           </a:p>
@@ -2816,7 +4102,7 @@
         <p:spPr>
           <a:xfrm>
             <a:off x="406301" y="870942"/>
-            <a:ext cx="8498026" cy="436066"/>
+            <a:ext cx="8498026" cy="426541"/>
           </a:xfrm>
           <a:prstGeom prst="rect">
             <a:avLst/>
@@ -2849,7 +4135,7 @@
                 <a:ea typeface="Arial" pitchFamily="34" charset="-122"/>
                 <a:cs typeface="Arial" pitchFamily="34" charset="-120"/>
               </a:rPr>
-              <a:t>– Printed summative quiz (one per student) — see </a:t>
+              <a:t>Students demonstrate (a) mastery of the module's concepts in a written summative quiz, and (b) their integrated </a:t>
             </a:r>
             <a:pPr algn="l" indent="0" marL="0">
               <a:lnSpc>
@@ -2864,7 +4150,7 @@
               <a:buNone/>
             </a:pPr>
             <a:r>
-              <a:rPr lang="en-US" sz="1200" dirty="0">
+              <a:rPr lang="en-US" sz="1200" i="1" dirty="0">
                 <a:solidFill>
                   <a:srgbClr val="1C2833"/>
                 </a:solidFill>
@@ -2872,7 +4158,7 @@
                 <a:ea typeface="Arial" pitchFamily="34" charset="-122"/>
                 <a:cs typeface="Arial" pitchFamily="34" charset="-120"/>
               </a:rPr>
-              <a:t>quizzes/summative.md</a:t>
+              <a:t>5-day doṣa-aware week</a:t>
             </a:r>
             <a:pPr algn="l" indent="0" marL="0">
               <a:lnSpc>
@@ -2895,7 +4181,7 @@
                 <a:ea typeface="Arial" pitchFamily="34" charset="-122"/>
                 <a:cs typeface="Arial" pitchFamily="34" charset="-120"/>
               </a:rPr>
-              <a:t> – A visible 3-minute timer – The rubric on the teacher's clipboard – Reflection slips for the closing (one per student)</a:t>
+              <a:t> project in a 3-minute presentation.</a:t>
             </a:r>
             <a:endParaRPr lang="en-US" sz="1200" dirty="0"/>
           </a:p>
@@ -3053,7 +4339,7 @@
                 <a:ea typeface="Georgia" pitchFamily="34" charset="-122"/>
                 <a:cs typeface="Georgia" pitchFamily="34" charset="-120"/>
               </a:rPr>
-              <a:t>Lesson flow</a:t>
+              <a:t>Materials</a:t>
             </a:r>
             <a:endParaRPr lang="en-US" sz="1800" dirty="0"/>
           </a:p>
@@ -3062,6 +4348,144 @@
       <p:sp>
         <p:nvSpPr>
           <p:cNvPr id="4" name="Text 2"/>
+          <p:cNvSpPr/>
+          <p:nvPr/>
+        </p:nvSpPr>
+        <p:spPr>
+          <a:xfrm>
+            <a:off x="634901" y="883593"/>
+            <a:ext cx="8102798" cy="1032272"/>
+          </a:xfrm>
+          <a:prstGeom prst="rect">
+            <a:avLst/>
+          </a:prstGeom>
+          <a:noFill/>
+          <a:ln/>
+        </p:spPr>
+        <p:txBody>
+          <a:bodyPr wrap="square" lIns="0" tIns="0" rIns="0" bIns="0" rtlCol="0" anchor="t"/>
+          <a:lstStyle/>
+          <a:p>
+            <a:pPr algn="l" marL="342900" indent="-342900">
+              <a:lnSpc>
+                <a:spcPts val="1620"/>
+              </a:lnSpc>
+              <a:spcAft>
+                <a:spcPts val="300"/>
+              </a:spcAft>
+              <a:buSzPct val="100000"/>
+              <a:buChar char="•"/>
+            </a:pPr>
+            <a:r>
+              <a:rPr lang="en-US" sz="1200" dirty="0">
+                <a:solidFill>
+                  <a:srgbClr val="1C2833"/>
+                </a:solidFill>
+                <a:latin typeface="Arial" pitchFamily="34" charset="0"/>
+                <a:ea typeface="Arial" pitchFamily="34" charset="-122"/>
+                <a:cs typeface="Arial" pitchFamily="34" charset="-120"/>
+              </a:rPr>
+              <a:t>Printed summative quiz (one per student) — see </a:t>
+            </a:r>
+            <a:pPr algn="l" indent="0" marL="0">
+              <a:lnSpc>
+                <a:spcPts val="1620"/>
+              </a:lnSpc>
+              <a:spcAft>
+                <a:spcPts val="300"/>
+              </a:spcAft>
+              <a:buNone/>
+            </a:pPr>
+            <a:r>
+              <a:rPr lang="en-US" sz="1200" dirty="0">
+                <a:solidFill>
+                  <a:srgbClr val="1C2833"/>
+                </a:solidFill>
+                <a:latin typeface="Arial" pitchFamily="34" charset="0"/>
+                <a:ea typeface="Arial" pitchFamily="34" charset="-122"/>
+                <a:cs typeface="Arial" pitchFamily="34" charset="-120"/>
+              </a:rPr>
+              <a:t>quizzes/summative.md</a:t>
+            </a:r>
+            <a:endParaRPr lang="en-US" sz="1200" dirty="0"/>
+          </a:p>
+          <a:p>
+            <a:pPr algn="l" marL="342900" indent="-342900">
+              <a:lnSpc>
+                <a:spcPts val="1620"/>
+              </a:lnSpc>
+              <a:spcAft>
+                <a:spcPts val="300"/>
+              </a:spcAft>
+              <a:buSzPct val="100000"/>
+              <a:buChar char="•"/>
+            </a:pPr>
+            <a:r>
+              <a:rPr lang="en-US" sz="1200" dirty="0">
+                <a:solidFill>
+                  <a:srgbClr val="1C2833"/>
+                </a:solidFill>
+                <a:latin typeface="Arial" pitchFamily="34" charset="0"/>
+                <a:ea typeface="Arial" pitchFamily="34" charset="-122"/>
+                <a:cs typeface="Arial" pitchFamily="34" charset="-120"/>
+              </a:rPr>
+              <a:t>A visible 3-minute timer</a:t>
+            </a:r>
+            <a:endParaRPr lang="en-US" sz="1200" dirty="0"/>
+          </a:p>
+          <a:p>
+            <a:pPr algn="l" marL="342900" indent="-342900">
+              <a:lnSpc>
+                <a:spcPts val="1620"/>
+              </a:lnSpc>
+              <a:spcAft>
+                <a:spcPts val="300"/>
+              </a:spcAft>
+              <a:buSzPct val="100000"/>
+              <a:buChar char="•"/>
+            </a:pPr>
+            <a:r>
+              <a:rPr lang="en-US" sz="1200" dirty="0">
+                <a:solidFill>
+                  <a:srgbClr val="1C2833"/>
+                </a:solidFill>
+                <a:latin typeface="Arial" pitchFamily="34" charset="0"/>
+                <a:ea typeface="Arial" pitchFamily="34" charset="-122"/>
+                <a:cs typeface="Arial" pitchFamily="34" charset="-120"/>
+              </a:rPr>
+              <a:t>The rubric on the teacher's clipboard</a:t>
+            </a:r>
+            <a:endParaRPr lang="en-US" sz="1200" dirty="0"/>
+          </a:p>
+          <a:p>
+            <a:pPr algn="l" marL="342900" indent="-342900">
+              <a:lnSpc>
+                <a:spcPts val="1620"/>
+              </a:lnSpc>
+              <a:spcAft>
+                <a:spcPts val="300"/>
+              </a:spcAft>
+              <a:buSzPct val="100000"/>
+              <a:buChar char="•"/>
+            </a:pPr>
+            <a:r>
+              <a:rPr lang="en-US" sz="1200" dirty="0">
+                <a:solidFill>
+                  <a:srgbClr val="1C2833"/>
+                </a:solidFill>
+                <a:latin typeface="Arial" pitchFamily="34" charset="0"/>
+                <a:ea typeface="Arial" pitchFamily="34" charset="-122"/>
+                <a:cs typeface="Arial" pitchFamily="34" charset="-120"/>
+              </a:rPr>
+              <a:t>Reflection slips for the closing (one per student)</a:t>
+            </a:r>
+            <a:endParaRPr lang="en-US" sz="1200" dirty="0"/>
+          </a:p>
+        </p:txBody>
+      </p:sp>
+      <p:sp>
+        <p:nvSpPr>
+          <p:cNvPr id="5" name="Text 3"/>
           <p:cNvSpPr/>
           <p:nvPr/>
         </p:nvSpPr>
@@ -3211,7 +4635,7 @@
                 <a:ea typeface="Georgia" pitchFamily="34" charset="-122"/>
                 <a:cs typeface="Georgia" pitchFamily="34" charset="-120"/>
               </a:rPr>
-              <a:t>Section 1 — Summative quiz (20 min)</a:t>
+              <a:t>Lesson flow</a:t>
             </a:r>
             <a:endParaRPr lang="en-US" sz="1800" dirty="0"/>
           </a:p>
@@ -3220,148 +4644,6 @@
       <p:sp>
         <p:nvSpPr>
           <p:cNvPr id="4" name="Text 2"/>
-          <p:cNvSpPr/>
-          <p:nvPr/>
-        </p:nvSpPr>
-        <p:spPr>
-          <a:xfrm>
-            <a:off x="406301" y="870942"/>
-            <a:ext cx="8498026" cy="436066"/>
-          </a:xfrm>
-          <a:prstGeom prst="rect">
-            <a:avLst/>
-          </a:prstGeom>
-          <a:noFill/>
-          <a:ln/>
-        </p:spPr>
-        <p:txBody>
-          <a:bodyPr wrap="square" lIns="0" tIns="0" rIns="0" bIns="0" rtlCol="0" anchor="t"/>
-          <a:lstStyle/>
-          <a:p>
-            <a:pPr algn="l" indent="0" marL="0">
-              <a:lnSpc>
-                <a:spcPts val="1680"/>
-              </a:lnSpc>
-              <a:spcBef>
-                <a:spcPts val="300"/>
-              </a:spcBef>
-              <a:spcAft>
-                <a:spcPts val="300"/>
-              </a:spcAft>
-              <a:buNone/>
-            </a:pPr>
-            <a:r>
-              <a:rPr lang="en-US" sz="1200" dirty="0">
-                <a:solidFill>
-                  <a:srgbClr val="1C2833"/>
-                </a:solidFill>
-                <a:latin typeface="Arial" pitchFamily="34" charset="0"/>
-                <a:ea typeface="Arial" pitchFamily="34" charset="-122"/>
-                <a:cs typeface="Arial" pitchFamily="34" charset="-120"/>
-              </a:rPr>
-              <a:t>– Hand out the quiz. 20 minutes, closed book. – Students may use IAST spelling if they prefer. Spelling tolerated if recognisable. – See </a:t>
-            </a:r>
-            <a:pPr algn="l" indent="0" marL="0">
-              <a:lnSpc>
-                <a:spcPts val="1680"/>
-              </a:lnSpc>
-              <a:spcBef>
-                <a:spcPts val="300"/>
-              </a:spcBef>
-              <a:spcAft>
-                <a:spcPts val="300"/>
-              </a:spcAft>
-              <a:buNone/>
-            </a:pPr>
-            <a:r>
-              <a:rPr lang="en-US" sz="1200" dirty="0">
-                <a:solidFill>
-                  <a:srgbClr val="1C2833"/>
-                </a:solidFill>
-                <a:latin typeface="Arial" pitchFamily="34" charset="0"/>
-                <a:ea typeface="Arial" pitchFamily="34" charset="-122"/>
-                <a:cs typeface="Arial" pitchFamily="34" charset="-120"/>
-              </a:rPr>
-              <a:t>quizzes/summative.md</a:t>
-            </a:r>
-            <a:pPr algn="l" indent="0" marL="0">
-              <a:lnSpc>
-                <a:spcPts val="1680"/>
-              </a:lnSpc>
-              <a:spcBef>
-                <a:spcPts val="300"/>
-              </a:spcBef>
-              <a:spcAft>
-                <a:spcPts val="300"/>
-              </a:spcAft>
-              <a:buNone/>
-            </a:pPr>
-            <a:r>
-              <a:rPr lang="en-US" sz="1200" dirty="0">
-                <a:solidFill>
-                  <a:srgbClr val="1C2833"/>
-                </a:solidFill>
-                <a:latin typeface="Arial" pitchFamily="34" charset="0"/>
-                <a:ea typeface="Arial" pitchFamily="34" charset="-122"/>
-                <a:cs typeface="Arial" pitchFamily="34" charset="-120"/>
-              </a:rPr>
-              <a:t> for the quiz + answer key.</a:t>
-            </a:r>
-            <a:endParaRPr lang="en-US" sz="1200" dirty="0"/>
-          </a:p>
-        </p:txBody>
-      </p:sp>
-      <p:sp>
-        <p:nvSpPr>
-          <p:cNvPr id="5" name="Text 3"/>
-          <p:cNvSpPr/>
-          <p:nvPr/>
-        </p:nvSpPr>
-        <p:spPr>
-          <a:xfrm>
-            <a:off x="406301" y="1383209"/>
-            <a:ext cx="8498026" cy="213271"/>
-          </a:xfrm>
-          <a:prstGeom prst="rect">
-            <a:avLst/>
-          </a:prstGeom>
-          <a:noFill/>
-          <a:ln/>
-        </p:spPr>
-        <p:txBody>
-          <a:bodyPr wrap="square" lIns="0" tIns="0" rIns="0" bIns="0" rtlCol="0" anchor="t"/>
-          <a:lstStyle/>
-          <a:p>
-            <a:pPr algn="l" indent="0" marL="0">
-              <a:lnSpc>
-                <a:spcPts val="1680"/>
-              </a:lnSpc>
-              <a:spcBef>
-                <a:spcPts val="300"/>
-              </a:spcBef>
-              <a:spcAft>
-                <a:spcPts val="300"/>
-              </a:spcAft>
-              <a:buNone/>
-            </a:pPr>
-            <a:r>
-              <a:rPr lang="en-US" sz="1200" dirty="0">
-                <a:solidFill>
-                  <a:srgbClr val="1C2833"/>
-                </a:solidFill>
-                <a:latin typeface="Arial" pitchFamily="34" charset="0"/>
-                <a:ea typeface="Arial" pitchFamily="34" charset="-122"/>
-                <a:cs typeface="Arial" pitchFamily="34" charset="-120"/>
-              </a:rPr>
-              <a:t>Teacher: while students write, set up the presentation timer and rubric clipboard.</a:t>
-            </a:r>
-            <a:endParaRPr lang="en-US" sz="1200" dirty="0"/>
-          </a:p>
-        </p:txBody>
-      </p:sp>
-      <p:sp>
-        <p:nvSpPr>
-          <p:cNvPr id="6" name="Text 4"/>
           <p:cNvSpPr/>
           <p:nvPr/>
         </p:nvSpPr>
@@ -3511,7 +4793,7 @@
                 <a:ea typeface="Georgia" pitchFamily="34" charset="-122"/>
                 <a:cs typeface="Georgia" pitchFamily="34" charset="-120"/>
               </a:rPr>
-              <a:t>Section 2 — Showcase + presentations (20 min)</a:t>
+              <a:t>Section 1 — Summative quiz (20 min)</a:t>
             </a:r>
             <a:endParaRPr lang="en-US" sz="1800" dirty="0"/>
           </a:p>
@@ -3525,8 +4807,8 @@
         </p:nvSpPr>
         <p:spPr>
           <a:xfrm>
-            <a:off x="406301" y="870942"/>
-            <a:ext cx="8498026" cy="639812"/>
+            <a:off x="634901" y="883593"/>
+            <a:ext cx="8102798" cy="788491"/>
           </a:xfrm>
           <a:prstGeom prst="rect">
             <a:avLst/>
@@ -3538,17 +4820,15 @@
           <a:bodyPr wrap="square" lIns="0" tIns="0" rIns="0" bIns="0" rtlCol="0" anchor="t"/>
           <a:lstStyle/>
           <a:p>
-            <a:pPr algn="l" indent="0" marL="0">
-              <a:lnSpc>
-                <a:spcPts val="1680"/>
-              </a:lnSpc>
-              <a:spcBef>
-                <a:spcPts val="300"/>
-              </a:spcBef>
-              <a:spcAft>
-                <a:spcPts val="300"/>
-              </a:spcAft>
-              <a:buNone/>
+            <a:pPr algn="l" marL="342900" indent="-342900">
+              <a:lnSpc>
+                <a:spcPts val="1620"/>
+              </a:lnSpc>
+              <a:spcAft>
+                <a:spcPts val="300"/>
+              </a:spcAft>
+              <a:buSzPct val="100000"/>
+              <a:buChar char="•"/>
             </a:pPr>
             <a:r>
               <a:rPr lang="en-US" sz="1200" dirty="0">
@@ -3559,47 +4839,23 @@
                 <a:ea typeface="Arial" pitchFamily="34" charset="-122"/>
                 <a:cs typeface="Arial" pitchFamily="34" charset="-120"/>
               </a:rPr>
-              <a:t>– Each student / pair presents for 3 minutes. – 1 minute for Q&amp;A. – 1 minute for teacher to mark + write a 1-sentence feedback note. – Total per presentation: 5 minutes. Plan for ~4 presentations per remaining class time; the rest spill into a second class if needed.</a:t>
+              <a:t>Hand out the quiz. 20 minutes, closed book.</a:t>
             </a:r>
             <a:endParaRPr lang="en-US" sz="1200" dirty="0"/>
           </a:p>
-        </p:txBody>
-      </p:sp>
-      <p:sp>
-        <p:nvSpPr>
-          <p:cNvPr id="5" name="Text 3"/>
-          <p:cNvSpPr/>
-          <p:nvPr/>
-        </p:nvSpPr>
-        <p:spPr>
-          <a:xfrm>
-            <a:off x="406301" y="1586954"/>
-            <a:ext cx="8498026" cy="426541"/>
-          </a:xfrm>
-          <a:prstGeom prst="rect">
-            <a:avLst/>
-          </a:prstGeom>
-          <a:noFill/>
-          <a:ln/>
-        </p:spPr>
-        <p:txBody>
-          <a:bodyPr wrap="square" lIns="0" tIns="0" rIns="0" bIns="0" rtlCol="0" anchor="t"/>
-          <a:lstStyle/>
-          <a:p>
-            <a:pPr algn="l" indent="0" marL="0">
-              <a:lnSpc>
-                <a:spcPts val="1680"/>
-              </a:lnSpc>
-              <a:spcBef>
-                <a:spcPts val="300"/>
-              </a:spcBef>
-              <a:spcAft>
-                <a:spcPts val="300"/>
-              </a:spcAft>
-              <a:buNone/>
-            </a:pPr>
-            <a:r>
-              <a:rPr lang="en-US" sz="1200" b="1" dirty="0">
+          <a:p>
+            <a:pPr algn="l" marL="342900" indent="-342900">
+              <a:lnSpc>
+                <a:spcPts val="1620"/>
+              </a:lnSpc>
+              <a:spcAft>
+                <a:spcPts val="300"/>
+              </a:spcAft>
+              <a:buSzPct val="100000"/>
+              <a:buChar char="•"/>
+            </a:pPr>
+            <a:r>
+              <a:rPr lang="en-US" sz="1200" dirty="0">
                 <a:solidFill>
                   <a:srgbClr val="1C2833"/>
                 </a:solidFill>
@@ -3607,19 +4863,20 @@
                 <a:ea typeface="Arial" pitchFamily="34" charset="-122"/>
                 <a:cs typeface="Arial" pitchFamily="34" charset="-120"/>
               </a:rPr>
-              <a:t>Logistics:</a:t>
-            </a:r>
-            <a:pPr algn="l" indent="0" marL="0">
-              <a:lnSpc>
-                <a:spcPts val="1680"/>
-              </a:lnSpc>
-              <a:spcBef>
-                <a:spcPts val="300"/>
-              </a:spcBef>
-              <a:spcAft>
-                <a:spcPts val="300"/>
-              </a:spcAft>
-              <a:buNone/>
+              <a:t>Students may use IAST spelling if they prefer. Spelling tolerated if recognisable.</a:t>
+            </a:r>
+            <a:endParaRPr lang="en-US" sz="1200" dirty="0"/>
+          </a:p>
+          <a:p>
+            <a:pPr algn="l" marL="342900" indent="-342900">
+              <a:lnSpc>
+                <a:spcPts val="1620"/>
+              </a:lnSpc>
+              <a:spcAft>
+                <a:spcPts val="300"/>
+              </a:spcAft>
+              <a:buSzPct val="100000"/>
+              <a:buChar char="•"/>
             </a:pPr>
             <a:r>
               <a:rPr lang="en-US" sz="1200" dirty="0">
@@ -3630,7 +4887,95 @@
                 <a:ea typeface="Arial" pitchFamily="34" charset="-122"/>
                 <a:cs typeface="Arial" pitchFamily="34" charset="-120"/>
               </a:rPr>
-              <a:t> – Order is random — draw names from a cup. – Start the timer the moment the student begins. – If a student goes over, the teacher gently raises a hand at the 3-minute mark. Wrap-up is permitted; new content is not.</a:t>
+              <a:t>See </a:t>
+            </a:r>
+            <a:pPr algn="l" indent="0" marL="0">
+              <a:lnSpc>
+                <a:spcPts val="1620"/>
+              </a:lnSpc>
+              <a:spcAft>
+                <a:spcPts val="300"/>
+              </a:spcAft>
+              <a:buNone/>
+            </a:pPr>
+            <a:r>
+              <a:rPr lang="en-US" sz="1200" dirty="0">
+                <a:solidFill>
+                  <a:srgbClr val="1C2833"/>
+                </a:solidFill>
+                <a:latin typeface="Arial" pitchFamily="34" charset="0"/>
+                <a:ea typeface="Arial" pitchFamily="34" charset="-122"/>
+                <a:cs typeface="Arial" pitchFamily="34" charset="-120"/>
+              </a:rPr>
+              <a:t>quizzes/summative.md</a:t>
+            </a:r>
+            <a:pPr algn="l" indent="0" marL="0">
+              <a:lnSpc>
+                <a:spcPts val="1620"/>
+              </a:lnSpc>
+              <a:spcAft>
+                <a:spcPts val="300"/>
+              </a:spcAft>
+              <a:buNone/>
+            </a:pPr>
+            <a:r>
+              <a:rPr lang="en-US" sz="1200" dirty="0">
+                <a:solidFill>
+                  <a:srgbClr val="1C2833"/>
+                </a:solidFill>
+                <a:latin typeface="Arial" pitchFamily="34" charset="0"/>
+                <a:ea typeface="Arial" pitchFamily="34" charset="-122"/>
+                <a:cs typeface="Arial" pitchFamily="34" charset="-120"/>
+              </a:rPr>
+              <a:t> for the quiz + answer key.</a:t>
+            </a:r>
+            <a:endParaRPr lang="en-US" sz="1200" dirty="0"/>
+          </a:p>
+        </p:txBody>
+      </p:sp>
+      <p:sp>
+        <p:nvSpPr>
+          <p:cNvPr id="5" name="Text 3"/>
+          <p:cNvSpPr/>
+          <p:nvPr/>
+        </p:nvSpPr>
+        <p:spPr>
+          <a:xfrm>
+            <a:off x="406301" y="1760934"/>
+            <a:ext cx="8498026" cy="213271"/>
+          </a:xfrm>
+          <a:prstGeom prst="rect">
+            <a:avLst/>
+          </a:prstGeom>
+          <a:noFill/>
+          <a:ln/>
+        </p:spPr>
+        <p:txBody>
+          <a:bodyPr wrap="square" lIns="0" tIns="0" rIns="0" bIns="0" rtlCol="0" anchor="t"/>
+          <a:lstStyle/>
+          <a:p>
+            <a:pPr algn="l" indent="0" marL="0">
+              <a:lnSpc>
+                <a:spcPts val="1680"/>
+              </a:lnSpc>
+              <a:spcBef>
+                <a:spcPts val="300"/>
+              </a:spcBef>
+              <a:spcAft>
+                <a:spcPts val="300"/>
+              </a:spcAft>
+              <a:buNone/>
+            </a:pPr>
+            <a:r>
+              <a:rPr lang="en-US" sz="1200" dirty="0">
+                <a:solidFill>
+                  <a:srgbClr val="1C2833"/>
+                </a:solidFill>
+                <a:latin typeface="Arial" pitchFamily="34" charset="0"/>
+                <a:ea typeface="Arial" pitchFamily="34" charset="-122"/>
+                <a:cs typeface="Arial" pitchFamily="34" charset="-120"/>
+              </a:rPr>
+              <a:t>Teacher: while students write, set up the presentation timer and rubric clipboard.</a:t>
             </a:r>
             <a:endParaRPr lang="en-US" sz="1200" dirty="0"/>
           </a:p>
@@ -3788,7 +5133,7 @@
                 <a:ea typeface="Georgia" pitchFamily="34" charset="-122"/>
                 <a:cs typeface="Georgia" pitchFamily="34" charset="-120"/>
               </a:rPr>
-              <a:t>Section 3 — Reflection (5 min)</a:t>
+              <a:t>Section 2 — Showcase + presentations (20 min)</a:t>
             </a:r>
             <a:endParaRPr lang="en-US" sz="1800" dirty="0"/>
           </a:p>
@@ -3802,8 +5147,8 @@
         </p:nvSpPr>
         <p:spPr>
           <a:xfrm>
-            <a:off x="406301" y="870942"/>
-            <a:ext cx="8498026" cy="213271"/>
+            <a:off x="634901" y="883593"/>
+            <a:ext cx="8102798" cy="1218902"/>
           </a:xfrm>
           <a:prstGeom prst="rect">
             <a:avLst/>
@@ -3815,17 +5160,15 @@
           <a:bodyPr wrap="square" lIns="0" tIns="0" rIns="0" bIns="0" rtlCol="0" anchor="t"/>
           <a:lstStyle/>
           <a:p>
-            <a:pPr algn="l" indent="0" marL="0">
-              <a:lnSpc>
-                <a:spcPts val="1680"/>
-              </a:lnSpc>
-              <a:spcBef>
-                <a:spcPts val="300"/>
-              </a:spcBef>
-              <a:spcAft>
-                <a:spcPts val="300"/>
-              </a:spcAft>
-              <a:buNone/>
+            <a:pPr algn="l" marL="342900" indent="-342900">
+              <a:lnSpc>
+                <a:spcPts val="1620"/>
+              </a:lnSpc>
+              <a:spcAft>
+                <a:spcPts val="300"/>
+              </a:spcAft>
+              <a:buSzPct val="100000"/>
+              <a:buChar char="•"/>
             </a:pPr>
             <a:r>
               <a:rPr lang="en-US" sz="1200" dirty="0">
@@ -3836,191 +5179,20 @@
                 <a:ea typeface="Arial" pitchFamily="34" charset="-122"/>
                 <a:cs typeface="Arial" pitchFamily="34" charset="-120"/>
               </a:rPr>
-              <a:t>Each student writes a 4-sentence reflection on the slip:</a:t>
+              <a:t>Each student / pair presents for 3 minutes.</a:t>
             </a:r>
             <a:endParaRPr lang="en-US" sz="1200" dirty="0"/>
           </a:p>
-        </p:txBody>
-      </p:sp>
-      <p:sp>
-        <p:nvSpPr>
-          <p:cNvPr id="5" name="Text 3"/>
-          <p:cNvSpPr/>
-          <p:nvPr/>
-        </p:nvSpPr>
-        <p:spPr>
-          <a:xfrm>
-            <a:off x="406301" y="1173063"/>
-            <a:ext cx="8331398" cy="1073944"/>
-          </a:xfrm>
-          <a:prstGeom prst="rect">
-            <a:avLst/>
-          </a:prstGeom>
-          <a:solidFill>
-            <a:srgbClr val="F4F8F9"/>
-          </a:solidFill>
-          <a:ln/>
-        </p:spPr>
-        <p:txBody>
-          <a:bodyPr wrap="square" rtlCol="0" anchor="ctr"/>
-          <a:lstStyle/>
-          <a:p>
-            <a:pPr indent="0" marL="0">
-              <a:buNone/>
-            </a:pPr>
-            <a:endParaRPr lang="en-US" dirty="0"/>
-          </a:p>
-        </p:txBody>
-      </p:sp>
-      <p:sp>
-        <p:nvSpPr>
-          <p:cNvPr id="6" name="Shape 4"/>
-          <p:cNvSpPr/>
-          <p:nvPr/>
-        </p:nvSpPr>
-        <p:spPr>
-          <a:xfrm>
-            <a:off x="434876" y="1173063"/>
-            <a:ext cx="0" cy="1073944"/>
-          </a:xfrm>
-          <a:prstGeom prst="line">
-            <a:avLst/>
-          </a:prstGeom>
-          <a:noFill/>
-          <a:ln w="57150">
-            <a:solidFill>
-              <a:srgbClr val="FE4447"/>
-            </a:solidFill>
-            <a:prstDash val="solid"/>
-          </a:ln>
-        </p:spPr>
-      </p:sp>
-      <p:sp>
-        <p:nvSpPr>
-          <p:cNvPr id="7" name="Text 5"/>
-          <p:cNvSpPr/>
-          <p:nvPr/>
-        </p:nvSpPr>
-        <p:spPr>
-          <a:xfrm>
-            <a:off x="692051" y="1363563"/>
-            <a:ext cx="7973389" cy="692944"/>
-          </a:xfrm>
-          <a:prstGeom prst="rect">
-            <a:avLst/>
-          </a:prstGeom>
-          <a:noFill/>
-          <a:ln/>
-        </p:spPr>
-        <p:txBody>
-          <a:bodyPr wrap="square" lIns="0" tIns="0" rIns="0" bIns="0" rtlCol="0" anchor="t"/>
-          <a:lstStyle/>
-          <a:p>
-            <a:pPr algn="l" indent="0" marL="0">
-              <a:lnSpc>
-                <a:spcPts val="1820"/>
-              </a:lnSpc>
-              <a:spcBef>
-                <a:spcPts val="300"/>
-              </a:spcBef>
-              <a:spcAft>
-                <a:spcPts val="300"/>
-              </a:spcAft>
-              <a:buNone/>
-            </a:pPr>
-            <a:r>
-              <a:rPr lang="en-US" sz="1300" dirty="0">
-                <a:solidFill>
-                  <a:srgbClr val="1C2833"/>
-                </a:solidFill>
-                <a:latin typeface="Georgia" pitchFamily="34" charset="0"/>
-                <a:ea typeface="Georgia" pitchFamily="34" charset="-122"/>
-                <a:cs typeface="Georgia" pitchFamily="34" charset="-120"/>
-              </a:rPr>
-              <a:t>1. The one thing I now notice that I didn't notice before this module: 2. The one concept I'm still uncertain about: 3. My honest assessment of my own </a:t>
-            </a:r>
-            <a:pPr algn="l" indent="0" marL="0">
-              <a:lnSpc>
-                <a:spcPts val="1820"/>
-              </a:lnSpc>
-              <a:spcBef>
-                <a:spcPts val="300"/>
-              </a:spcBef>
-              <a:spcAft>
-                <a:spcPts val="300"/>
-              </a:spcAft>
-              <a:buNone/>
-            </a:pPr>
-            <a:r>
-              <a:rPr lang="en-US" sz="1300" i="1" dirty="0">
-                <a:solidFill>
-                  <a:srgbClr val="1C2833"/>
-                </a:solidFill>
-                <a:latin typeface="Georgia" pitchFamily="34" charset="0"/>
-                <a:ea typeface="Georgia" pitchFamily="34" charset="-122"/>
-                <a:cs typeface="Georgia" pitchFamily="34" charset="-120"/>
-              </a:rPr>
-              <a:t>5-day doṣa-aware week</a:t>
-            </a:r>
-            <a:pPr algn="l" indent="0" marL="0">
-              <a:lnSpc>
-                <a:spcPts val="1820"/>
-              </a:lnSpc>
-              <a:spcBef>
-                <a:spcPts val="300"/>
-              </a:spcBef>
-              <a:spcAft>
-                <a:spcPts val="300"/>
-              </a:spcAft>
-              <a:buNone/>
-            </a:pPr>
-            <a:r>
-              <a:rPr lang="en-US" sz="1300" dirty="0">
-                <a:solidFill>
-                  <a:srgbClr val="1C2833"/>
-                </a:solidFill>
-                <a:latin typeface="Georgia" pitchFamily="34" charset="0"/>
-                <a:ea typeface="Georgia" pitchFamily="34" charset="-122"/>
-                <a:cs typeface="Georgia" pitchFamily="34" charset="-120"/>
-              </a:rPr>
-              <a:t>: 4. One way I'll use what I learned beyond this class:</a:t>
-            </a:r>
-            <a:endParaRPr lang="en-US" sz="1300" dirty="0"/>
-          </a:p>
-        </p:txBody>
-      </p:sp>
-      <p:sp>
-        <p:nvSpPr>
-          <p:cNvPr id="8" name="Text 6"/>
-          <p:cNvSpPr/>
-          <p:nvPr/>
-        </p:nvSpPr>
-        <p:spPr>
-          <a:xfrm>
-            <a:off x="406301" y="2335857"/>
-            <a:ext cx="8498026" cy="213271"/>
-          </a:xfrm>
-          <a:prstGeom prst="rect">
-            <a:avLst/>
-          </a:prstGeom>
-          <a:noFill/>
-          <a:ln/>
-        </p:spPr>
-        <p:txBody>
-          <a:bodyPr wrap="square" lIns="0" tIns="0" rIns="0" bIns="0" rtlCol="0" anchor="t"/>
-          <a:lstStyle/>
-          <a:p>
-            <a:pPr algn="l" indent="0" marL="0">
-              <a:lnSpc>
-                <a:spcPts val="1680"/>
-              </a:lnSpc>
-              <a:spcBef>
-                <a:spcPts val="300"/>
-              </a:spcBef>
-              <a:spcAft>
-                <a:spcPts val="300"/>
-              </a:spcAft>
-              <a:buNone/>
+          <a:p>
+            <a:pPr algn="l" marL="342900" indent="-342900">
+              <a:lnSpc>
+                <a:spcPts val="1620"/>
+              </a:lnSpc>
+              <a:spcAft>
+                <a:spcPts val="300"/>
+              </a:spcAft>
+              <a:buSzPct val="100000"/>
+              <a:buChar char="•"/>
             </a:pPr>
             <a:r>
               <a:rPr lang="en-US" sz="1200" dirty="0">
@@ -4031,15 +5203,63 @@
                 <a:ea typeface="Arial" pitchFamily="34" charset="-122"/>
                 <a:cs typeface="Arial" pitchFamily="34" charset="-120"/>
               </a:rPr>
-              <a:t>Submit with the project artefact.</a:t>
+              <a:t>1 minute for Q&amp;A.</a:t>
             </a:r>
             <a:endParaRPr lang="en-US" sz="1200" dirty="0"/>
           </a:p>
-        </p:txBody>
-      </p:sp>
-      <p:sp>
-        <p:nvSpPr>
-          <p:cNvPr id="9" name="Text 7"/>
+          <a:p>
+            <a:pPr algn="l" marL="342900" indent="-342900">
+              <a:lnSpc>
+                <a:spcPts val="1620"/>
+              </a:lnSpc>
+              <a:spcAft>
+                <a:spcPts val="300"/>
+              </a:spcAft>
+              <a:buSzPct val="100000"/>
+              <a:buChar char="•"/>
+            </a:pPr>
+            <a:r>
+              <a:rPr lang="en-US" sz="1200" dirty="0">
+                <a:solidFill>
+                  <a:srgbClr val="1C2833"/>
+                </a:solidFill>
+                <a:latin typeface="Arial" pitchFamily="34" charset="0"/>
+                <a:ea typeface="Arial" pitchFamily="34" charset="-122"/>
+                <a:cs typeface="Arial" pitchFamily="34" charset="-120"/>
+              </a:rPr>
+              <a:t>1 minute for teacher to mark + write a 1-sentence feedback note.</a:t>
+            </a:r>
+            <a:endParaRPr lang="en-US" sz="1200" dirty="0"/>
+          </a:p>
+          <a:p>
+            <a:pPr algn="l" marL="342900" indent="-342900">
+              <a:lnSpc>
+                <a:spcPts val="1620"/>
+              </a:lnSpc>
+              <a:spcAft>
+                <a:spcPts val="300"/>
+              </a:spcAft>
+              <a:buSzPct val="100000"/>
+              <a:buChar char="•"/>
+            </a:pPr>
+            <a:r>
+              <a:rPr lang="en-US" sz="1200" dirty="0">
+                <a:solidFill>
+                  <a:srgbClr val="1C2833"/>
+                </a:solidFill>
+                <a:latin typeface="Arial" pitchFamily="34" charset="0"/>
+                <a:ea typeface="Arial" pitchFamily="34" charset="-122"/>
+                <a:cs typeface="Arial" pitchFamily="34" charset="-120"/>
+              </a:rPr>
+              <a:t>Total per presentation: 5 minutes. Plan for ~4 presentations per remaining class time; the rest spill into a second class if needed.</a:t>
+            </a:r>
+            <a:endParaRPr lang="en-US" sz="1200" dirty="0"/>
+          </a:p>
+        </p:txBody>
+      </p:sp>
+      <p:sp>
+        <p:nvSpPr>
+          <p:cNvPr id="5" name="Text 3"/>
           <p:cNvSpPr/>
           <p:nvPr/>
         </p:nvSpPr>
@@ -4189,7 +5409,7 @@
                 <a:ea typeface="Georgia" pitchFamily="34" charset="-122"/>
                 <a:cs typeface="Georgia" pitchFamily="34" charset="-120"/>
               </a:rPr>
-              <a:t>Student-facing content</a:t>
+              <a:t>Section 2 — Showcase + presentations (20 min) (cont.)</a:t>
             </a:r>
             <a:endParaRPr lang="en-US" sz="1800" dirty="0"/>
           </a:p>
@@ -4203,61 +5423,8 @@
         </p:nvSpPr>
         <p:spPr>
           <a:xfrm>
-            <a:off x="406301" y="883593"/>
-            <a:ext cx="8331398" cy="1612106"/>
-          </a:xfrm>
-          <a:prstGeom prst="rect">
-            <a:avLst/>
-          </a:prstGeom>
-          <a:solidFill>
-            <a:srgbClr val="F4F8F9"/>
-          </a:solidFill>
-          <a:ln/>
-        </p:spPr>
-        <p:txBody>
-          <a:bodyPr wrap="square" rtlCol="0" anchor="ctr"/>
-          <a:lstStyle/>
-          <a:p>
-            <a:pPr indent="0" marL="0">
-              <a:buNone/>
-            </a:pPr>
-            <a:endParaRPr lang="en-US" dirty="0"/>
-          </a:p>
-        </p:txBody>
-      </p:sp>
-      <p:sp>
-        <p:nvSpPr>
-          <p:cNvPr id="5" name="Shape 3"/>
-          <p:cNvSpPr/>
-          <p:nvPr/>
-        </p:nvSpPr>
-        <p:spPr>
-          <a:xfrm>
-            <a:off x="434876" y="883593"/>
-            <a:ext cx="0" cy="1612106"/>
-          </a:xfrm>
-          <a:prstGeom prst="line">
-            <a:avLst/>
-          </a:prstGeom>
-          <a:noFill/>
-          <a:ln w="57150">
-            <a:solidFill>
-              <a:srgbClr val="FE4447"/>
-            </a:solidFill>
-            <a:prstDash val="solid"/>
-          </a:ln>
-        </p:spPr>
-      </p:sp>
-      <p:sp>
-        <p:nvSpPr>
-          <p:cNvPr id="6" name="Text 4"/>
-          <p:cNvSpPr/>
-          <p:nvPr/>
-        </p:nvSpPr>
-        <p:spPr>
-          <a:xfrm>
-            <a:off x="692051" y="1074093"/>
-            <a:ext cx="7973389" cy="230981"/>
+            <a:off x="406301" y="870942"/>
+            <a:ext cx="8498026" cy="213271"/>
           </a:xfrm>
           <a:prstGeom prst="rect">
             <a:avLst/>
@@ -4271,7 +5438,7 @@
           <a:p>
             <a:pPr algn="l" indent="0" marL="0">
               <a:lnSpc>
-                <a:spcPts val="1820"/>
+                <a:spcPts val="1680"/>
               </a:lnSpc>
               <a:spcBef>
                 <a:spcPts val="300"/>
@@ -4282,30 +5449,30 @@
               <a:buNone/>
             </a:pPr>
             <a:r>
-              <a:rPr lang="en-US" sz="1300" b="1" i="1" dirty="0">
-                <a:solidFill>
-                  <a:srgbClr val="1C2833"/>
-                </a:solidFill>
-                <a:latin typeface="Georgia" pitchFamily="34" charset="0"/>
-                <a:ea typeface="Georgia" pitchFamily="34" charset="-122"/>
-                <a:cs typeface="Georgia" pitchFamily="34" charset="-120"/>
-              </a:rPr>
-              <a:t>What Day 10 covers:</a:t>
-            </a:r>
-            <a:endParaRPr lang="en-US" sz="1300" dirty="0"/>
-          </a:p>
-        </p:txBody>
-      </p:sp>
-      <p:sp>
-        <p:nvSpPr>
-          <p:cNvPr id="7" name="Text 5"/>
-          <p:cNvSpPr/>
-          <p:nvPr/>
-        </p:nvSpPr>
-        <p:spPr>
-          <a:xfrm>
-            <a:off x="692051" y="1343174"/>
-            <a:ext cx="7973389" cy="692944"/>
+              <a:rPr lang="en-US" sz="1200" b="1" dirty="0">
+                <a:solidFill>
+                  <a:srgbClr val="1C2833"/>
+                </a:solidFill>
+                <a:latin typeface="Arial" pitchFamily="34" charset="0"/>
+                <a:ea typeface="Arial" pitchFamily="34" charset="-122"/>
+                <a:cs typeface="Arial" pitchFamily="34" charset="-120"/>
+              </a:rPr>
+              <a:t>Logistics:</a:t>
+            </a:r>
+            <a:endParaRPr lang="en-US" sz="1200" dirty="0"/>
+          </a:p>
+        </p:txBody>
+      </p:sp>
+      <p:sp>
+        <p:nvSpPr>
+          <p:cNvPr id="5" name="Text 3"/>
+          <p:cNvSpPr/>
+          <p:nvPr/>
+        </p:nvSpPr>
+        <p:spPr>
+          <a:xfrm>
+            <a:off x="634901" y="1173063"/>
+            <a:ext cx="8102798" cy="769441"/>
           </a:xfrm>
           <a:prstGeom prst="rect">
             <a:avLst/>
@@ -4317,291 +5484,82 @@
           <a:bodyPr wrap="square" lIns="0" tIns="0" rIns="0" bIns="0" rtlCol="0" anchor="t"/>
           <a:lstStyle/>
           <a:p>
-            <a:pPr algn="l" indent="0" marL="0">
-              <a:lnSpc>
-                <a:spcPts val="1820"/>
-              </a:lnSpc>
-              <a:spcBef>
-                <a:spcPts val="300"/>
-              </a:spcBef>
-              <a:spcAft>
-                <a:spcPts val="300"/>
-              </a:spcAft>
-              <a:buNone/>
-            </a:pPr>
-            <a:r>
-              <a:rPr lang="en-US" sz="1300" dirty="0">
-                <a:solidFill>
-                  <a:srgbClr val="1C2833"/>
-                </a:solidFill>
-                <a:latin typeface="Georgia" pitchFamily="34" charset="0"/>
-                <a:ea typeface="Georgia" pitchFamily="34" charset="-122"/>
-                <a:cs typeface="Georgia" pitchFamily="34" charset="-120"/>
-              </a:rPr>
-              <a:t>1. </a:t>
-            </a:r>
-            <a:pPr algn="l" indent="0" marL="0">
-              <a:lnSpc>
-                <a:spcPts val="1820"/>
-              </a:lnSpc>
-              <a:spcBef>
-                <a:spcPts val="300"/>
-              </a:spcBef>
-              <a:spcAft>
-                <a:spcPts val="300"/>
-              </a:spcAft>
-              <a:buNone/>
-            </a:pPr>
-            <a:r>
-              <a:rPr lang="en-US" sz="1300" b="1" i="1" dirty="0">
-                <a:solidFill>
-                  <a:srgbClr val="1C2833"/>
-                </a:solidFill>
-                <a:latin typeface="Georgia" pitchFamily="34" charset="0"/>
-                <a:ea typeface="Georgia" pitchFamily="34" charset="-122"/>
-                <a:cs typeface="Georgia" pitchFamily="34" charset="-120"/>
-              </a:rPr>
-              <a:t>Summative quiz</a:t>
-            </a:r>
-            <a:pPr algn="l" indent="0" marL="0">
-              <a:lnSpc>
-                <a:spcPts val="1820"/>
-              </a:lnSpc>
-              <a:spcBef>
-                <a:spcPts val="300"/>
-              </a:spcBef>
-              <a:spcAft>
-                <a:spcPts val="300"/>
-              </a:spcAft>
-              <a:buNone/>
-            </a:pPr>
-            <a:r>
-              <a:rPr lang="en-US" sz="1300" dirty="0">
-                <a:solidFill>
-                  <a:srgbClr val="1C2833"/>
-                </a:solidFill>
-                <a:latin typeface="Georgia" pitchFamily="34" charset="0"/>
-                <a:ea typeface="Georgia" pitchFamily="34" charset="-122"/>
-                <a:cs typeface="Georgia" pitchFamily="34" charset="-120"/>
-              </a:rPr>
-              <a:t> (20 min, 25 marks). Closed book. Mix of MCQ, short answer, diagram, open response. 2. </a:t>
-            </a:r>
-            <a:pPr algn="l" indent="0" marL="0">
-              <a:lnSpc>
-                <a:spcPts val="1820"/>
-              </a:lnSpc>
-              <a:spcBef>
-                <a:spcPts val="300"/>
-              </a:spcBef>
-              <a:spcAft>
-                <a:spcPts val="300"/>
-              </a:spcAft>
-              <a:buNone/>
-            </a:pPr>
-            <a:r>
-              <a:rPr lang="en-US" sz="1300" b="1" i="1" dirty="0">
-                <a:solidFill>
-                  <a:srgbClr val="1C2833"/>
-                </a:solidFill>
-                <a:latin typeface="Georgia" pitchFamily="34" charset="0"/>
-                <a:ea typeface="Georgia" pitchFamily="34" charset="-122"/>
-                <a:cs typeface="Georgia" pitchFamily="34" charset="-120"/>
-              </a:rPr>
-              <a:t>3-min presentation</a:t>
-            </a:r>
-            <a:pPr algn="l" indent="0" marL="0">
-              <a:lnSpc>
-                <a:spcPts val="1820"/>
-              </a:lnSpc>
-              <a:spcBef>
-                <a:spcPts val="300"/>
-              </a:spcBef>
-              <a:spcAft>
-                <a:spcPts val="300"/>
-              </a:spcAft>
-              <a:buNone/>
-            </a:pPr>
-            <a:r>
-              <a:rPr lang="en-US" sz="1300" dirty="0">
-                <a:solidFill>
-                  <a:srgbClr val="1C2833"/>
-                </a:solidFill>
-                <a:latin typeface="Georgia" pitchFamily="34" charset="0"/>
-                <a:ea typeface="Georgia" pitchFamily="34" charset="-122"/>
-                <a:cs typeface="Georgia" pitchFamily="34" charset="-120"/>
-              </a:rPr>
-              <a:t> of your </a:t>
-            </a:r>
-            <a:pPr algn="l" indent="0" marL="0">
-              <a:lnSpc>
-                <a:spcPts val="1820"/>
-              </a:lnSpc>
-              <a:spcBef>
-                <a:spcPts val="300"/>
-              </a:spcBef>
-              <a:spcAft>
-                <a:spcPts val="300"/>
-              </a:spcAft>
-              <a:buNone/>
-            </a:pPr>
-            <a:r>
-              <a:rPr lang="en-US" sz="1300" i="1" dirty="0">
-                <a:solidFill>
-                  <a:srgbClr val="1C2833"/>
-                </a:solidFill>
-                <a:latin typeface="Georgia" pitchFamily="34" charset="0"/>
-                <a:ea typeface="Georgia" pitchFamily="34" charset="-122"/>
-                <a:cs typeface="Georgia" pitchFamily="34" charset="-120"/>
-              </a:rPr>
-              <a:t>5-day doṣa-aware week</a:t>
-            </a:r>
-            <a:pPr algn="l" indent="0" marL="0">
-              <a:lnSpc>
-                <a:spcPts val="1820"/>
-              </a:lnSpc>
-              <a:spcBef>
-                <a:spcPts val="300"/>
-              </a:spcBef>
-              <a:spcAft>
-                <a:spcPts val="300"/>
-              </a:spcAft>
-              <a:buNone/>
-            </a:pPr>
-            <a:r>
-              <a:rPr lang="en-US" sz="1300" dirty="0">
-                <a:solidFill>
-                  <a:srgbClr val="1C2833"/>
-                </a:solidFill>
-                <a:latin typeface="Georgia" pitchFamily="34" charset="0"/>
-                <a:ea typeface="Georgia" pitchFamily="34" charset="-122"/>
-                <a:cs typeface="Georgia" pitchFamily="34" charset="-120"/>
-              </a:rPr>
-              <a:t>. Plus 1 min Q&amp;A. 3. </a:t>
-            </a:r>
-            <a:pPr algn="l" indent="0" marL="0">
-              <a:lnSpc>
-                <a:spcPts val="1820"/>
-              </a:lnSpc>
-              <a:spcBef>
-                <a:spcPts val="300"/>
-              </a:spcBef>
-              <a:spcAft>
-                <a:spcPts val="300"/>
-              </a:spcAft>
-              <a:buNone/>
-            </a:pPr>
-            <a:r>
-              <a:rPr lang="en-US" sz="1300" b="1" i="1" dirty="0">
-                <a:solidFill>
-                  <a:srgbClr val="1C2833"/>
-                </a:solidFill>
-                <a:latin typeface="Georgia" pitchFamily="34" charset="0"/>
-                <a:ea typeface="Georgia" pitchFamily="34" charset="-122"/>
-                <a:cs typeface="Georgia" pitchFamily="34" charset="-120"/>
-              </a:rPr>
-              <a:t>Reflection slip</a:t>
-            </a:r>
-            <a:pPr algn="l" indent="0" marL="0">
-              <a:lnSpc>
-                <a:spcPts val="1820"/>
-              </a:lnSpc>
-              <a:spcBef>
-                <a:spcPts val="300"/>
-              </a:spcBef>
-              <a:spcAft>
-                <a:spcPts val="300"/>
-              </a:spcAft>
-              <a:buNone/>
-            </a:pPr>
-            <a:r>
-              <a:rPr lang="en-US" sz="1300" dirty="0">
-                <a:solidFill>
-                  <a:srgbClr val="1C2833"/>
-                </a:solidFill>
-                <a:latin typeface="Georgia" pitchFamily="34" charset="0"/>
-                <a:ea typeface="Georgia" pitchFamily="34" charset="-122"/>
-                <a:cs typeface="Georgia" pitchFamily="34" charset="-120"/>
-              </a:rPr>
-              <a:t> (4 sentences, in class).</a:t>
-            </a:r>
-            <a:endParaRPr lang="en-US" sz="1300" dirty="0"/>
-          </a:p>
-        </p:txBody>
-      </p:sp>
-      <p:sp>
-        <p:nvSpPr>
-          <p:cNvPr id="8" name="Text 6"/>
-          <p:cNvSpPr/>
-          <p:nvPr/>
-        </p:nvSpPr>
-        <p:spPr>
-          <a:xfrm>
-            <a:off x="692051" y="2074218"/>
-            <a:ext cx="7973389" cy="230981"/>
-          </a:xfrm>
-          <a:prstGeom prst="rect">
-            <a:avLst/>
-          </a:prstGeom>
-          <a:noFill/>
-          <a:ln/>
-        </p:spPr>
-        <p:txBody>
-          <a:bodyPr wrap="square" lIns="0" tIns="0" rIns="0" bIns="0" rtlCol="0" anchor="t"/>
-          <a:lstStyle/>
-          <a:p>
-            <a:pPr algn="l" indent="0" marL="0">
-              <a:lnSpc>
-                <a:spcPts val="1820"/>
-              </a:lnSpc>
-              <a:spcBef>
-                <a:spcPts val="300"/>
-              </a:spcBef>
-              <a:spcAft>
-                <a:spcPts val="300"/>
-              </a:spcAft>
-              <a:buNone/>
-            </a:pPr>
-            <a:r>
-              <a:rPr lang="en-US" sz="1300" b="1" i="1" dirty="0">
-                <a:solidFill>
-                  <a:srgbClr val="1C2833"/>
-                </a:solidFill>
-                <a:latin typeface="Georgia" pitchFamily="34" charset="0"/>
-                <a:ea typeface="Georgia" pitchFamily="34" charset="-122"/>
-                <a:cs typeface="Georgia" pitchFamily="34" charset="-120"/>
-              </a:rPr>
-              <a:t>Total grade:</a:t>
-            </a:r>
-            <a:pPr algn="l" indent="0" marL="0">
-              <a:lnSpc>
-                <a:spcPts val="1820"/>
-              </a:lnSpc>
-              <a:spcBef>
-                <a:spcPts val="300"/>
-              </a:spcBef>
-              <a:spcAft>
-                <a:spcPts val="300"/>
-              </a:spcAft>
-              <a:buNone/>
-            </a:pPr>
-            <a:r>
-              <a:rPr lang="en-US" sz="1300" dirty="0">
-                <a:solidFill>
-                  <a:srgbClr val="1C2833"/>
-                </a:solidFill>
-                <a:latin typeface="Georgia" pitchFamily="34" charset="0"/>
-                <a:ea typeface="Georgia" pitchFamily="34" charset="-122"/>
-                <a:cs typeface="Georgia" pitchFamily="34" charset="-120"/>
-              </a:rPr>
-              <a:t> 40 marks (25 quiz + 30 project — see rubric — scaled with presentation).</a:t>
-            </a:r>
-            <a:endParaRPr lang="en-US" sz="1300" dirty="0"/>
-          </a:p>
-        </p:txBody>
-      </p:sp>
-      <p:sp>
-        <p:nvSpPr>
-          <p:cNvPr id="9" name="Text 7"/>
+            <a:pPr algn="l" marL="342900" indent="-342900">
+              <a:lnSpc>
+                <a:spcPts val="1620"/>
+              </a:lnSpc>
+              <a:spcAft>
+                <a:spcPts val="300"/>
+              </a:spcAft>
+              <a:buSzPct val="100000"/>
+              <a:buChar char="•"/>
+            </a:pPr>
+            <a:r>
+              <a:rPr lang="en-US" sz="1200" dirty="0">
+                <a:solidFill>
+                  <a:srgbClr val="1C2833"/>
+                </a:solidFill>
+                <a:latin typeface="Arial" pitchFamily="34" charset="0"/>
+                <a:ea typeface="Arial" pitchFamily="34" charset="-122"/>
+                <a:cs typeface="Arial" pitchFamily="34" charset="-120"/>
+              </a:rPr>
+              <a:t>Order is random — draw names from a cup.</a:t>
+            </a:r>
+            <a:endParaRPr lang="en-US" sz="1200" dirty="0"/>
+          </a:p>
+          <a:p>
+            <a:pPr algn="l" marL="342900" indent="-342900">
+              <a:lnSpc>
+                <a:spcPts val="1620"/>
+              </a:lnSpc>
+              <a:spcAft>
+                <a:spcPts val="300"/>
+              </a:spcAft>
+              <a:buSzPct val="100000"/>
+              <a:buChar char="•"/>
+            </a:pPr>
+            <a:r>
+              <a:rPr lang="en-US" sz="1200" dirty="0">
+                <a:solidFill>
+                  <a:srgbClr val="1C2833"/>
+                </a:solidFill>
+                <a:latin typeface="Arial" pitchFamily="34" charset="0"/>
+                <a:ea typeface="Arial" pitchFamily="34" charset="-122"/>
+                <a:cs typeface="Arial" pitchFamily="34" charset="-120"/>
+              </a:rPr>
+              <a:t>Start the timer the moment the student begins.</a:t>
+            </a:r>
+            <a:endParaRPr lang="en-US" sz="1200" dirty="0"/>
+          </a:p>
+          <a:p>
+            <a:pPr algn="l" marL="342900" indent="-342900">
+              <a:lnSpc>
+                <a:spcPts val="1620"/>
+              </a:lnSpc>
+              <a:spcAft>
+                <a:spcPts val="300"/>
+              </a:spcAft>
+              <a:buSzPct val="100000"/>
+              <a:buChar char="•"/>
+            </a:pPr>
+            <a:r>
+              <a:rPr lang="en-US" sz="1200" dirty="0">
+                <a:solidFill>
+                  <a:srgbClr val="1C2833"/>
+                </a:solidFill>
+                <a:latin typeface="Arial" pitchFamily="34" charset="0"/>
+                <a:ea typeface="Arial" pitchFamily="34" charset="-122"/>
+                <a:cs typeface="Arial" pitchFamily="34" charset="-120"/>
+              </a:rPr>
+              <a:t>If a student goes over, the teacher gently raises a hand at the 3-minute mark. Wrap-up is permitted; new content is not.</a:t>
+            </a:r>
+            <a:endParaRPr lang="en-US" sz="1200" dirty="0"/>
+          </a:p>
+        </p:txBody>
+      </p:sp>
+      <p:sp>
+        <p:nvSpPr>
+          <p:cNvPr id="6" name="Text 4"/>
           <p:cNvSpPr/>
           <p:nvPr/>
         </p:nvSpPr>
@@ -4751,7 +5709,7 @@
                 <a:ea typeface="Georgia" pitchFamily="34" charset="-122"/>
                 <a:cs typeface="Georgia" pitchFamily="34" charset="-120"/>
               </a:rPr>
-              <a:t>Closing</a:t>
+              <a:t>Section 3 — Reflection (5 min)</a:t>
             </a:r>
             <a:endParaRPr lang="en-US" sz="1800" dirty="0"/>
           </a:p>
@@ -4766,7 +5724,7 @@
         <p:spPr>
           <a:xfrm>
             <a:off x="406301" y="870942"/>
-            <a:ext cx="8498026" cy="426541"/>
+            <a:ext cx="8498026" cy="213271"/>
           </a:xfrm>
           <a:prstGeom prst="rect">
             <a:avLst/>
@@ -4799,11 +5757,89 @@
                 <a:ea typeface="Arial" pitchFamily="34" charset="-122"/>
                 <a:cs typeface="Arial" pitchFamily="34" charset="-120"/>
               </a:rPr>
-              <a:t>– Class chants the three doṣa names + qualities one last time. – Teacher closes with one sentence: </a:t>
-            </a:r>
-            <a:pPr algn="l" indent="0" marL="0">
-              <a:lnSpc>
-                <a:spcPts val="1680"/>
+              <a:t>Each student writes a 4-sentence reflection on the slip:</a:t>
+            </a:r>
+            <a:endParaRPr lang="en-US" sz="1200" dirty="0"/>
+          </a:p>
+        </p:txBody>
+      </p:sp>
+      <p:sp>
+        <p:nvSpPr>
+          <p:cNvPr id="5" name="Text 3"/>
+          <p:cNvSpPr/>
+          <p:nvPr/>
+        </p:nvSpPr>
+        <p:spPr>
+          <a:xfrm>
+            <a:off x="406301" y="1173063"/>
+            <a:ext cx="8331398" cy="1419225"/>
+          </a:xfrm>
+          <a:prstGeom prst="rect">
+            <a:avLst/>
+          </a:prstGeom>
+          <a:solidFill>
+            <a:srgbClr val="F4F8F9"/>
+          </a:solidFill>
+          <a:ln/>
+        </p:spPr>
+        <p:txBody>
+          <a:bodyPr wrap="square" rtlCol="0" anchor="ctr"/>
+          <a:lstStyle/>
+          <a:p>
+            <a:pPr indent="0" marL="0">
+              <a:buNone/>
+            </a:pPr>
+            <a:endParaRPr lang="en-US" dirty="0"/>
+          </a:p>
+        </p:txBody>
+      </p:sp>
+      <p:sp>
+        <p:nvSpPr>
+          <p:cNvPr id="6" name="Shape 4"/>
+          <p:cNvSpPr/>
+          <p:nvPr/>
+        </p:nvSpPr>
+        <p:spPr>
+          <a:xfrm>
+            <a:off x="434876" y="1173063"/>
+            <a:ext cx="0" cy="1419225"/>
+          </a:xfrm>
+          <a:prstGeom prst="line">
+            <a:avLst/>
+          </a:prstGeom>
+          <a:noFill/>
+          <a:ln w="57150">
+            <a:solidFill>
+              <a:srgbClr val="FE4447"/>
+            </a:solidFill>
+            <a:prstDash val="solid"/>
+          </a:ln>
+        </p:spPr>
+      </p:sp>
+      <p:sp>
+        <p:nvSpPr>
+          <p:cNvPr id="7" name="Text 5"/>
+          <p:cNvSpPr/>
+          <p:nvPr/>
+        </p:nvSpPr>
+        <p:spPr>
+          <a:xfrm>
+            <a:off x="692051" y="1363563"/>
+            <a:ext cx="7973389" cy="230981"/>
+          </a:xfrm>
+          <a:prstGeom prst="rect">
+            <a:avLst/>
+          </a:prstGeom>
+          <a:noFill/>
+          <a:ln/>
+        </p:spPr>
+        <p:txBody>
+          <a:bodyPr wrap="square" lIns="0" tIns="0" rIns="0" bIns="0" rtlCol="0" anchor="t"/>
+          <a:lstStyle/>
+          <a:p>
+            <a:pPr algn="l" indent="0" marL="0">
+              <a:lnSpc>
+                <a:spcPts val="1820"/>
               </a:lnSpc>
               <a:spcBef>
                 <a:spcPts val="300"/>
@@ -4814,23 +5850,213 @@
               <a:buNone/>
             </a:pPr>
             <a:r>
-              <a:rPr lang="en-US" sz="1200" i="1" dirty="0">
-                <a:solidFill>
-                  <a:srgbClr val="1C2833"/>
-                </a:solidFill>
-                <a:latin typeface="Arial" pitchFamily="34" charset="0"/>
-                <a:ea typeface="Arial" pitchFamily="34" charset="-122"/>
-                <a:cs typeface="Arial" pitchFamily="34" charset="-120"/>
-              </a:rPr>
-              <a:t>"The framework is yours now. Use it lightly. See a doctor when you need to."</a:t>
-            </a:r>
-            <a:endParaRPr lang="en-US" sz="1200" dirty="0"/>
-          </a:p>
-        </p:txBody>
-      </p:sp>
-      <p:sp>
-        <p:nvSpPr>
-          <p:cNvPr id="5" name="Text 3"/>
+              <a:rPr lang="en-US" sz="1300" i="1" dirty="0">
+                <a:solidFill>
+                  <a:srgbClr val="1C2833"/>
+                </a:solidFill>
+                <a:latin typeface="Georgia" pitchFamily="34" charset="0"/>
+                <a:ea typeface="Georgia" pitchFamily="34" charset="-122"/>
+                <a:cs typeface="Georgia" pitchFamily="34" charset="-120"/>
+              </a:rPr>
+              <a:t>The one thing I now notice that I didn't notice before this module:</a:t>
+            </a:r>
+            <a:endParaRPr lang="en-US" sz="1300" dirty="0"/>
+          </a:p>
+        </p:txBody>
+      </p:sp>
+      <p:sp>
+        <p:nvSpPr>
+          <p:cNvPr id="8" name="Text 6"/>
+          <p:cNvSpPr/>
+          <p:nvPr/>
+        </p:nvSpPr>
+        <p:spPr>
+          <a:xfrm>
+            <a:off x="692051" y="1632645"/>
+            <a:ext cx="7973389" cy="230981"/>
+          </a:xfrm>
+          <a:prstGeom prst="rect">
+            <a:avLst/>
+          </a:prstGeom>
+          <a:noFill/>
+          <a:ln/>
+        </p:spPr>
+        <p:txBody>
+          <a:bodyPr wrap="square" lIns="0" tIns="0" rIns="0" bIns="0" rtlCol="0" anchor="t"/>
+          <a:lstStyle/>
+          <a:p>
+            <a:pPr algn="l" indent="0" marL="0">
+              <a:lnSpc>
+                <a:spcPts val="1820"/>
+              </a:lnSpc>
+              <a:spcBef>
+                <a:spcPts val="300"/>
+              </a:spcBef>
+              <a:spcAft>
+                <a:spcPts val="300"/>
+              </a:spcAft>
+              <a:buNone/>
+            </a:pPr>
+            <a:r>
+              <a:rPr lang="en-US" sz="1300" i="1" dirty="0">
+                <a:solidFill>
+                  <a:srgbClr val="1C2833"/>
+                </a:solidFill>
+                <a:latin typeface="Georgia" pitchFamily="34" charset="0"/>
+                <a:ea typeface="Georgia" pitchFamily="34" charset="-122"/>
+                <a:cs typeface="Georgia" pitchFamily="34" charset="-120"/>
+              </a:rPr>
+              <a:t>The one concept I'm still uncertain about:</a:t>
+            </a:r>
+            <a:endParaRPr lang="en-US" sz="1300" dirty="0"/>
+          </a:p>
+        </p:txBody>
+      </p:sp>
+      <p:sp>
+        <p:nvSpPr>
+          <p:cNvPr id="9" name="Text 7"/>
+          <p:cNvSpPr/>
+          <p:nvPr/>
+        </p:nvSpPr>
+        <p:spPr>
+          <a:xfrm>
+            <a:off x="692051" y="1901726"/>
+            <a:ext cx="7973389" cy="230981"/>
+          </a:xfrm>
+          <a:prstGeom prst="rect">
+            <a:avLst/>
+          </a:prstGeom>
+          <a:noFill/>
+          <a:ln/>
+        </p:spPr>
+        <p:txBody>
+          <a:bodyPr wrap="square" lIns="0" tIns="0" rIns="0" bIns="0" rtlCol="0" anchor="t"/>
+          <a:lstStyle/>
+          <a:p>
+            <a:pPr algn="l" indent="0" marL="0">
+              <a:lnSpc>
+                <a:spcPts val="1820"/>
+              </a:lnSpc>
+              <a:spcBef>
+                <a:spcPts val="300"/>
+              </a:spcBef>
+              <a:spcAft>
+                <a:spcPts val="300"/>
+              </a:spcAft>
+              <a:buNone/>
+            </a:pPr>
+            <a:r>
+              <a:rPr lang="en-US" sz="1300" dirty="0">
+                <a:solidFill>
+                  <a:srgbClr val="1C2833"/>
+                </a:solidFill>
+                <a:latin typeface="Georgia" pitchFamily="34" charset="0"/>
+                <a:ea typeface="Georgia" pitchFamily="34" charset="-122"/>
+                <a:cs typeface="Georgia" pitchFamily="34" charset="-120"/>
+              </a:rPr>
+              <a:t>My honest assessment of my own </a:t>
+            </a:r>
+            <a:pPr algn="l" indent="0" marL="0">
+              <a:lnSpc>
+                <a:spcPts val="1820"/>
+              </a:lnSpc>
+              <a:spcBef>
+                <a:spcPts val="300"/>
+              </a:spcBef>
+              <a:spcAft>
+                <a:spcPts val="300"/>
+              </a:spcAft>
+              <a:buNone/>
+            </a:pPr>
+            <a:r>
+              <a:rPr lang="en-US" sz="1300" i="1" dirty="0">
+                <a:solidFill>
+                  <a:srgbClr val="1C2833"/>
+                </a:solidFill>
+                <a:latin typeface="Georgia" pitchFamily="34" charset="0"/>
+                <a:ea typeface="Georgia" pitchFamily="34" charset="-122"/>
+                <a:cs typeface="Georgia" pitchFamily="34" charset="-120"/>
+              </a:rPr>
+              <a:t>5-day doṣa-aware week</a:t>
+            </a:r>
+            <a:pPr algn="l" indent="0" marL="0">
+              <a:lnSpc>
+                <a:spcPts val="1820"/>
+              </a:lnSpc>
+              <a:spcBef>
+                <a:spcPts val="300"/>
+              </a:spcBef>
+              <a:spcAft>
+                <a:spcPts val="300"/>
+              </a:spcAft>
+              <a:buNone/>
+            </a:pPr>
+            <a:r>
+              <a:rPr lang="en-US" sz="1300" dirty="0">
+                <a:solidFill>
+                  <a:srgbClr val="1C2833"/>
+                </a:solidFill>
+                <a:latin typeface="Georgia" pitchFamily="34" charset="0"/>
+                <a:ea typeface="Georgia" pitchFamily="34" charset="-122"/>
+                <a:cs typeface="Georgia" pitchFamily="34" charset="-120"/>
+              </a:rPr>
+              <a:t>:</a:t>
+            </a:r>
+            <a:endParaRPr lang="en-US" sz="1300" dirty="0"/>
+          </a:p>
+        </p:txBody>
+      </p:sp>
+      <p:sp>
+        <p:nvSpPr>
+          <p:cNvPr id="10" name="Text 8"/>
+          <p:cNvSpPr/>
+          <p:nvPr/>
+        </p:nvSpPr>
+        <p:spPr>
+          <a:xfrm>
+            <a:off x="692051" y="2170807"/>
+            <a:ext cx="7973389" cy="230981"/>
+          </a:xfrm>
+          <a:prstGeom prst="rect">
+            <a:avLst/>
+          </a:prstGeom>
+          <a:noFill/>
+          <a:ln/>
+        </p:spPr>
+        <p:txBody>
+          <a:bodyPr wrap="square" lIns="0" tIns="0" rIns="0" bIns="0" rtlCol="0" anchor="t"/>
+          <a:lstStyle/>
+          <a:p>
+            <a:pPr algn="l" indent="0" marL="0">
+              <a:lnSpc>
+                <a:spcPts val="1820"/>
+              </a:lnSpc>
+              <a:spcBef>
+                <a:spcPts val="300"/>
+              </a:spcBef>
+              <a:spcAft>
+                <a:spcPts val="300"/>
+              </a:spcAft>
+              <a:buNone/>
+            </a:pPr>
+            <a:r>
+              <a:rPr lang="en-US" sz="1300" i="1" dirty="0">
+                <a:solidFill>
+                  <a:srgbClr val="1C2833"/>
+                </a:solidFill>
+                <a:latin typeface="Georgia" pitchFamily="34" charset="0"/>
+                <a:ea typeface="Georgia" pitchFamily="34" charset="-122"/>
+                <a:cs typeface="Georgia" pitchFamily="34" charset="-120"/>
+              </a:rPr>
+              <a:t>One way I'll use what I learned beyond this class:</a:t>
+            </a:r>
+            <a:endParaRPr lang="en-US" sz="1300" dirty="0"/>
+          </a:p>
+        </p:txBody>
+      </p:sp>
+      <p:sp>
+        <p:nvSpPr>
+          <p:cNvPr id="11" name="Text 9"/>
           <p:cNvSpPr/>
           <p:nvPr/>
         </p:nvSpPr>
@@ -4980,7 +6206,7 @@
                 <a:ea typeface="Georgia" pitchFamily="34" charset="-122"/>
                 <a:cs typeface="Georgia" pitchFamily="34" charset="-120"/>
               </a:rPr>
-              <a:t>Differentiation</a:t>
+              <a:t>Section 3 — Reflection (5 min) (cont.)</a:t>
             </a:r>
             <a:endParaRPr lang="en-US" sz="1800" dirty="0"/>
           </a:p>
@@ -4994,8 +6220,8 @@
         </p:nvSpPr>
         <p:spPr>
           <a:xfrm>
-            <a:off x="634901" y="883593"/>
-            <a:ext cx="8102798" cy="731341"/>
+            <a:off x="406301" y="870942"/>
+            <a:ext cx="8498026" cy="213271"/>
           </a:xfrm>
           <a:prstGeom prst="rect">
             <a:avLst/>
@@ -5007,18 +6233,20 @@
           <a:bodyPr wrap="square" lIns="0" tIns="0" rIns="0" bIns="0" rtlCol="0" anchor="t"/>
           <a:lstStyle/>
           <a:p>
-            <a:pPr algn="l" marL="342900" indent="-342900">
-              <a:lnSpc>
-                <a:spcPts val="1620"/>
-              </a:lnSpc>
-              <a:spcAft>
-                <a:spcPts val="300"/>
-              </a:spcAft>
-              <a:buSzPct val="100000"/>
-              <a:buChar char="•"/>
-            </a:pPr>
-            <a:r>
-              <a:rPr lang="en-US" sz="1200" b="1" dirty="0">
+            <a:pPr algn="l" indent="0" marL="0">
+              <a:lnSpc>
+                <a:spcPts val="1680"/>
+              </a:lnSpc>
+              <a:spcBef>
+                <a:spcPts val="300"/>
+              </a:spcBef>
+              <a:spcAft>
+                <a:spcPts val="300"/>
+              </a:spcAft>
+              <a:buNone/>
+            </a:pPr>
+            <a:r>
+              <a:rPr lang="en-US" sz="1200" dirty="0">
                 <a:solidFill>
                   <a:srgbClr val="1C2833"/>
                 </a:solidFill>
@@ -5026,71 +6254,7 @@
                 <a:ea typeface="Arial" pitchFamily="34" charset="-122"/>
                 <a:cs typeface="Arial" pitchFamily="34" charset="-120"/>
               </a:rPr>
-              <a:t>One tier up:</a:t>
-            </a:r>
-            <a:pPr algn="l" indent="0" marL="0">
-              <a:lnSpc>
-                <a:spcPts val="1620"/>
-              </a:lnSpc>
-              <a:spcAft>
-                <a:spcPts val="300"/>
-              </a:spcAft>
-              <a:buNone/>
-            </a:pPr>
-            <a:r>
-              <a:rPr lang="en-US" sz="1200" dirty="0">
-                <a:solidFill>
-                  <a:srgbClr val="1C2833"/>
-                </a:solidFill>
-                <a:latin typeface="Arial" pitchFamily="34" charset="0"/>
-                <a:ea typeface="Arial" pitchFamily="34" charset="-122"/>
-                <a:cs typeface="Arial" pitchFamily="34" charset="-120"/>
-              </a:rPr>
-              <a:t> During Q&amp;A, students who finish early can field harder questions ("how would you balance kapha in monsoon vs vāta in winter — argue both?")</a:t>
-            </a:r>
-            <a:endParaRPr lang="en-US" sz="1200" dirty="0"/>
-          </a:p>
-          <a:p>
-            <a:pPr algn="l" marL="342900" indent="-342900">
-              <a:lnSpc>
-                <a:spcPts val="1620"/>
-              </a:lnSpc>
-              <a:spcAft>
-                <a:spcPts val="300"/>
-              </a:spcAft>
-              <a:buSzPct val="100000"/>
-              <a:buChar char="•"/>
-            </a:pPr>
-            <a:r>
-              <a:rPr lang="en-US" sz="1200" b="1" dirty="0">
-                <a:solidFill>
-                  <a:srgbClr val="1C2833"/>
-                </a:solidFill>
-                <a:latin typeface="Arial" pitchFamily="34" charset="0"/>
-                <a:ea typeface="Arial" pitchFamily="34" charset="-122"/>
-                <a:cs typeface="Arial" pitchFamily="34" charset="-120"/>
-              </a:rPr>
-              <a:t>One tier down:</a:t>
-            </a:r>
-            <a:pPr algn="l" indent="0" marL="0">
-              <a:lnSpc>
-                <a:spcPts val="1620"/>
-              </a:lnSpc>
-              <a:spcAft>
-                <a:spcPts val="300"/>
-              </a:spcAft>
-              <a:buNone/>
-            </a:pPr>
-            <a:r>
-              <a:rPr lang="en-US" sz="1200" dirty="0">
-                <a:solidFill>
-                  <a:srgbClr val="1C2833"/>
-                </a:solidFill>
-                <a:latin typeface="Arial" pitchFamily="34" charset="0"/>
-                <a:ea typeface="Arial" pitchFamily="34" charset="-122"/>
-                <a:cs typeface="Arial" pitchFamily="34" charset="-120"/>
-              </a:rPr>
-              <a:t> Allow open-book on the summative quiz's open-response section only.</a:t>
+              <a:t>Submit with the project artefact.</a:t>
             </a:r>
             <a:endParaRPr lang="en-US" sz="1200" dirty="0"/>
           </a:p>
